--- a/output/wendy_wu_report.pptx
+++ b/output/wendy_wu_report.pptx
@@ -41,6 +41,8 @@
     <p:sldId id="289" r:id="rId40"/>
     <p:sldId id="290" r:id="rId41"/>
     <p:sldId id="291" r:id="rId42"/>
+    <p:sldId id="292" r:id="rId43"/>
+    <p:sldId id="293" r:id="rId44"/>
   </p:sldIdLst>
   <p:sldSz cx="12191695" cy="6858000" type="screen4x3"/>
   <p:notesSz cx="6858000" cy="9144000"/>
@@ -3404,7 +3406,7 @@
               </a:defRPr>
             </a:pPr>
             <a:r>
-              <a:t>Performance Max generated 524 leads from £31,672.69 with a quarter CPL of £60.44.</a:t>
+              <a:t>Performance Max generated 618 leads from £36,584.24 with a quarter CPL of £59.20.</a:t>
             </a:r>
           </a:p>
           <a:p>
@@ -3416,7 +3418,7 @@
               </a:defRPr>
             </a:pPr>
             <a:r>
-              <a:t>Best efficiency was in Jan (£56.18 CPL), while Mar was highest at £72.07.</a:t>
+              <a:t>Best efficiency was in Jan (£56.18 CPL), while Feb was highest at £63.57.</a:t>
             </a:r>
           </a:p>
           <a:p>
@@ -3428,7 +3430,7 @@
               </a:defRPr>
             </a:pPr>
             <a:r>
-              <a:t>YoY vs same quarter last year: leads -64.06%, spend +43.99%.</a:t>
+              <a:t>YoY vs same quarter last year: leads -57.61%, spend +66.32%.</a:t>
             </a:r>
           </a:p>
         </p:txBody>
@@ -3905,105 +3907,105 @@
                       <a:pPr algn="ctr"/>
                       <a:r>
                         <a:rPr b="0" sz="1000"/>
-                        <a:t>571,869</a:t>
-                      </a:r>
-                    </a:p>
-                  </a:txBody>
-                  <a:tcPr/>
-                </a:tc>
-                <a:tc>
-                  <a:txBody>
-                    <a:bodyPr/>
-                    <a:lstStyle/>
-                    <a:p>
-                      <a:pPr algn="ctr"/>
-                      <a:r>
-                        <a:rPr b="0" sz="1000"/>
-                        <a:t>3,582</a:t>
-                      </a:r>
-                    </a:p>
-                  </a:txBody>
-                  <a:tcPr/>
-                </a:tc>
-                <a:tc>
-                  <a:txBody>
-                    <a:bodyPr/>
-                    <a:lstStyle/>
-                    <a:p>
-                      <a:pPr algn="ctr"/>
-                      <a:r>
-                        <a:rPr b="0" sz="1000"/>
-                        <a:t>0.63%</a:t>
-                      </a:r>
-                    </a:p>
-                  </a:txBody>
-                  <a:tcPr/>
-                </a:tc>
-                <a:tc>
-                  <a:txBody>
-                    <a:bodyPr/>
-                    <a:lstStyle/>
-                    <a:p>
-                      <a:pPr algn="ctr"/>
-                      <a:r>
-                        <a:rPr b="0" sz="1000"/>
-                        <a:t>£0.87</a:t>
-                      </a:r>
-                    </a:p>
-                  </a:txBody>
-                  <a:tcPr/>
-                </a:tc>
-                <a:tc>
-                  <a:txBody>
-                    <a:bodyPr/>
-                    <a:lstStyle/>
-                    <a:p>
-                      <a:pPr algn="ctr"/>
-                      <a:r>
-                        <a:rPr b="0" sz="1000"/>
-                        <a:t>£3,098.86</a:t>
-                      </a:r>
-                    </a:p>
-                  </a:txBody>
-                  <a:tcPr/>
-                </a:tc>
-                <a:tc>
-                  <a:txBody>
-                    <a:bodyPr/>
-                    <a:lstStyle/>
-                    <a:p>
-                      <a:pPr algn="ctr"/>
-                      <a:r>
-                        <a:rPr b="0" sz="1000"/>
-                        <a:t>43</a:t>
-                      </a:r>
-                    </a:p>
-                  </a:txBody>
-                  <a:tcPr/>
-                </a:tc>
-                <a:tc>
-                  <a:txBody>
-                    <a:bodyPr/>
-                    <a:lstStyle/>
-                    <a:p>
-                      <a:pPr algn="ctr"/>
-                      <a:r>
-                        <a:rPr b="0" sz="1000"/>
-                        <a:t>£72.07</a:t>
-                      </a:r>
-                    </a:p>
-                  </a:txBody>
-                  <a:tcPr/>
-                </a:tc>
-                <a:tc>
-                  <a:txBody>
-                    <a:bodyPr/>
-                    <a:lstStyle/>
-                    <a:p>
-                      <a:pPr algn="ctr"/>
-                      <a:r>
-                        <a:rPr b="0" sz="1000"/>
-                        <a:t>1.20%</a:t>
+                        <a:t>1,125,512</a:t>
+                      </a:r>
+                    </a:p>
+                  </a:txBody>
+                  <a:tcPr/>
+                </a:tc>
+                <a:tc>
+                  <a:txBody>
+                    <a:bodyPr/>
+                    <a:lstStyle/>
+                    <a:p>
+                      <a:pPr algn="ctr"/>
+                      <a:r>
+                        <a:rPr b="0" sz="1000"/>
+                        <a:t>9,916</a:t>
+                      </a:r>
+                    </a:p>
+                  </a:txBody>
+                  <a:tcPr/>
+                </a:tc>
+                <a:tc>
+                  <a:txBody>
+                    <a:bodyPr/>
+                    <a:lstStyle/>
+                    <a:p>
+                      <a:pPr algn="ctr"/>
+                      <a:r>
+                        <a:rPr b="0" sz="1000"/>
+                        <a:t>0.88%</a:t>
+                      </a:r>
+                    </a:p>
+                  </a:txBody>
+                  <a:tcPr/>
+                </a:tc>
+                <a:tc>
+                  <a:txBody>
+                    <a:bodyPr/>
+                    <a:lstStyle/>
+                    <a:p>
+                      <a:pPr algn="ctr"/>
+                      <a:r>
+                        <a:rPr b="0" sz="1000"/>
+                        <a:t>£0.81</a:t>
+                      </a:r>
+                    </a:p>
+                  </a:txBody>
+                  <a:tcPr/>
+                </a:tc>
+                <a:tc>
+                  <a:txBody>
+                    <a:bodyPr/>
+                    <a:lstStyle/>
+                    <a:p>
+                      <a:pPr algn="ctr"/>
+                      <a:r>
+                        <a:rPr b="0" sz="1000"/>
+                        <a:t>£8,010.41</a:t>
+                      </a:r>
+                    </a:p>
+                  </a:txBody>
+                  <a:tcPr/>
+                </a:tc>
+                <a:tc>
+                  <a:txBody>
+                    <a:bodyPr/>
+                    <a:lstStyle/>
+                    <a:p>
+                      <a:pPr algn="ctr"/>
+                      <a:r>
+                        <a:rPr b="0" sz="1000"/>
+                        <a:t>137</a:t>
+                      </a:r>
+                    </a:p>
+                  </a:txBody>
+                  <a:tcPr/>
+                </a:tc>
+                <a:tc>
+                  <a:txBody>
+                    <a:bodyPr/>
+                    <a:lstStyle/>
+                    <a:p>
+                      <a:pPr algn="ctr"/>
+                      <a:r>
+                        <a:rPr b="0" sz="1000"/>
+                        <a:t>£58.47</a:t>
+                      </a:r>
+                    </a:p>
+                  </a:txBody>
+                  <a:tcPr/>
+                </a:tc>
+                <a:tc>
+                  <a:txBody>
+                    <a:bodyPr/>
+                    <a:lstStyle/>
+                    <a:p>
+                      <a:pPr algn="ctr"/>
+                      <a:r>
+                        <a:rPr b="0" sz="1000"/>
+                        <a:t>1.38%</a:t>
                       </a:r>
                     </a:p>
                   </a:txBody>
@@ -4037,7 +4039,7 @@
                       <a:pPr algn="ctr"/>
                       <a:r>
                         <a:rPr b="1" sz="1000"/>
-                        <a:t>4,911,675</a:t>
+                        <a:t>5,465,318</a:t>
                       </a:r>
                     </a:p>
                   </a:txBody>
@@ -4055,7 +4057,7 @@
                       <a:pPr algn="ctr"/>
                       <a:r>
                         <a:rPr b="1" sz="1000"/>
-                        <a:t>36,834</a:t>
+                        <a:t>43,168</a:t>
                       </a:r>
                     </a:p>
                   </a:txBody>
@@ -4073,7 +4075,7 @@
                       <a:pPr algn="ctr"/>
                       <a:r>
                         <a:rPr b="1" sz="1000"/>
-                        <a:t>0.75%</a:t>
+                        <a:t>0.79%</a:t>
                       </a:r>
                     </a:p>
                   </a:txBody>
@@ -4091,7 +4093,7 @@
                       <a:pPr algn="ctr"/>
                       <a:r>
                         <a:rPr b="1" sz="1000"/>
-                        <a:t>£0.86</a:t>
+                        <a:t>£0.85</a:t>
                       </a:r>
                     </a:p>
                   </a:txBody>
@@ -4109,7 +4111,7 @@
                       <a:pPr algn="ctr"/>
                       <a:r>
                         <a:rPr b="1" sz="1000"/>
-                        <a:t>£31,672.69</a:t>
+                        <a:t>£36,584.24</a:t>
                       </a:r>
                     </a:p>
                   </a:txBody>
@@ -4127,7 +4129,7 @@
                       <a:pPr algn="ctr"/>
                       <a:r>
                         <a:rPr b="1" sz="1000"/>
-                        <a:t>524</a:t>
+                        <a:t>618</a:t>
                       </a:r>
                     </a:p>
                   </a:txBody>
@@ -4145,7 +4147,7 @@
                       <a:pPr algn="ctr"/>
                       <a:r>
                         <a:rPr b="1" sz="1000"/>
-                        <a:t>£60.44</a:t>
+                        <a:t>£59.20</a:t>
                       </a:r>
                     </a:p>
                   </a:txBody>
@@ -4163,7 +4165,7 @@
                       <a:pPr algn="ctr"/>
                       <a:r>
                         <a:rPr b="1" sz="1000"/>
-                        <a:t>1.42%</a:t>
+                        <a:t>1.43%</a:t>
                       </a:r>
                     </a:p>
                   </a:txBody>
@@ -4352,7 +4354,7 @@
               </a:defRPr>
             </a:pPr>
             <a:r>
-              <a:t>Performance Max generated 524 leads from £31,672.69 with a quarter CPL of £60.44.</a:t>
+              <a:t>Performance Max generated 618 leads from £36,584.24 with a quarter CPL of £59.20.</a:t>
             </a:r>
           </a:p>
           <a:p>
@@ -4364,7 +4366,7 @@
               </a:defRPr>
             </a:pPr>
             <a:r>
-              <a:t>Best efficiency was in Jan (£56.18 CPL), while Mar was highest at £72.07.</a:t>
+              <a:t>Best efficiency was in Jan (£56.18 CPL), while Feb was highest at £63.57.</a:t>
             </a:r>
           </a:p>
           <a:p>
@@ -4376,7 +4378,7 @@
               </a:defRPr>
             </a:pPr>
             <a:r>
-              <a:t>YoY vs same quarter last year: leads -64.06%, spend +43.99%.</a:t>
+              <a:t>YoY vs same quarter last year: leads -57.61%, spend +66.32%.</a:t>
             </a:r>
           </a:p>
         </p:txBody>
@@ -4603,7 +4605,7 @@
               </a:defRPr>
             </a:pPr>
             <a:r>
-              <a:t>Demand Gen generated 257 leads from £24,911.65 with a quarter CPL of £96.93.</a:t>
+              <a:t>Demand Gen generated 277 leads from £26,745.71 with a quarter CPL of £96.55.</a:t>
             </a:r>
           </a:p>
           <a:p>
@@ -4615,7 +4617,7 @@
               </a:defRPr>
             </a:pPr>
             <a:r>
-              <a:t>Best efficiency was in Jan (£91.56 CPL), while Mar was highest at £130.90.</a:t>
+              <a:t>Best efficiency was in Jan (£91.56 CPL), while Mar was highest at £110.27.</a:t>
             </a:r>
           </a:p>
           <a:p>
@@ -4627,7 +4629,7 @@
               </a:defRPr>
             </a:pPr>
             <a:r>
-              <a:t>YoY vs same quarter last year: leads +729.03%, spend +1267.38%.</a:t>
+              <a:t>YoY vs same quarter last year: leads +793.55%, spend +1368.05%.</a:t>
             </a:r>
           </a:p>
         </p:txBody>
@@ -5104,21 +5106,21 @@
                       <a:pPr algn="ctr"/>
                       <a:r>
                         <a:rPr b="0" sz="1000"/>
-                        <a:t>589,545</a:t>
-                      </a:r>
-                    </a:p>
-                  </a:txBody>
-                  <a:tcPr/>
-                </a:tc>
-                <a:tc>
-                  <a:txBody>
-                    <a:bodyPr/>
-                    <a:lstStyle/>
-                    <a:p>
-                      <a:pPr algn="ctr"/>
-                      <a:r>
-                        <a:rPr b="0" sz="1000"/>
-                        <a:t>4,257</a:t>
+                        <a:t>1,050,884</a:t>
+                      </a:r>
+                    </a:p>
+                  </a:txBody>
+                  <a:tcPr/>
+                </a:tc>
+                <a:tc>
+                  <a:txBody>
+                    <a:bodyPr/>
+                    <a:lstStyle/>
+                    <a:p>
+                      <a:pPr algn="ctr"/>
+                      <a:r>
+                        <a:rPr b="0" sz="1000"/>
+                        <a:t>7,596</a:t>
                       </a:r>
                     </a:p>
                   </a:txBody>
@@ -5160,49 +5162,49 @@
                       <a:pPr algn="ctr"/>
                       <a:r>
                         <a:rPr b="0" sz="1000"/>
-                        <a:t>£2,356.26</a:t>
-                      </a:r>
-                    </a:p>
-                  </a:txBody>
-                  <a:tcPr/>
-                </a:tc>
-                <a:tc>
-                  <a:txBody>
-                    <a:bodyPr/>
-                    <a:lstStyle/>
-                    <a:p>
-                      <a:pPr algn="ctr"/>
-                      <a:r>
-                        <a:rPr b="0" sz="1000"/>
-                        <a:t>18</a:t>
-                      </a:r>
-                    </a:p>
-                  </a:txBody>
-                  <a:tcPr/>
-                </a:tc>
-                <a:tc>
-                  <a:txBody>
-                    <a:bodyPr/>
-                    <a:lstStyle/>
-                    <a:p>
-                      <a:pPr algn="ctr"/>
-                      <a:r>
-                        <a:rPr b="0" sz="1000"/>
-                        <a:t>£130.90</a:t>
-                      </a:r>
-                    </a:p>
-                  </a:txBody>
-                  <a:tcPr/>
-                </a:tc>
-                <a:tc>
-                  <a:txBody>
-                    <a:bodyPr/>
-                    <a:lstStyle/>
-                    <a:p>
-                      <a:pPr algn="ctr"/>
-                      <a:r>
-                        <a:rPr b="0" sz="1000"/>
-                        <a:t>0.42%</a:t>
+                        <a:t>£4,190.32</a:t>
+                      </a:r>
+                    </a:p>
+                  </a:txBody>
+                  <a:tcPr/>
+                </a:tc>
+                <a:tc>
+                  <a:txBody>
+                    <a:bodyPr/>
+                    <a:lstStyle/>
+                    <a:p>
+                      <a:pPr algn="ctr"/>
+                      <a:r>
+                        <a:rPr b="0" sz="1000"/>
+                        <a:t>38</a:t>
+                      </a:r>
+                    </a:p>
+                  </a:txBody>
+                  <a:tcPr/>
+                </a:tc>
+                <a:tc>
+                  <a:txBody>
+                    <a:bodyPr/>
+                    <a:lstStyle/>
+                    <a:p>
+                      <a:pPr algn="ctr"/>
+                      <a:r>
+                        <a:rPr b="0" sz="1000"/>
+                        <a:t>£110.27</a:t>
+                      </a:r>
+                    </a:p>
+                  </a:txBody>
+                  <a:tcPr/>
+                </a:tc>
+                <a:tc>
+                  <a:txBody>
+                    <a:bodyPr/>
+                    <a:lstStyle/>
+                    <a:p>
+                      <a:pPr algn="ctr"/>
+                      <a:r>
+                        <a:rPr b="0" sz="1000"/>
+                        <a:t>0.50%</a:t>
                       </a:r>
                     </a:p>
                   </a:txBody>
@@ -5236,7 +5238,7 @@
                       <a:pPr algn="ctr"/>
                       <a:r>
                         <a:rPr b="1" sz="1000"/>
-                        <a:t>4,962,154</a:t>
+                        <a:t>5,423,493</a:t>
                       </a:r>
                     </a:p>
                   </a:txBody>
@@ -5254,7 +5256,7 @@
                       <a:pPr algn="ctr"/>
                       <a:r>
                         <a:rPr b="1" sz="1000"/>
-                        <a:t>40,937</a:t>
+                        <a:t>44,276</a:t>
                       </a:r>
                     </a:p>
                   </a:txBody>
@@ -5290,7 +5292,7 @@
                       <a:pPr algn="ctr"/>
                       <a:r>
                         <a:rPr b="1" sz="1000"/>
-                        <a:t>£0.61</a:t>
+                        <a:t>£0.60</a:t>
                       </a:r>
                     </a:p>
                   </a:txBody>
@@ -5308,7 +5310,7 @@
                       <a:pPr algn="ctr"/>
                       <a:r>
                         <a:rPr b="1" sz="1000"/>
-                        <a:t>£24,911.65</a:t>
+                        <a:t>£26,745.71</a:t>
                       </a:r>
                     </a:p>
                   </a:txBody>
@@ -5326,7 +5328,7 @@
                       <a:pPr algn="ctr"/>
                       <a:r>
                         <a:rPr b="1" sz="1000"/>
-                        <a:t>257</a:t>
+                        <a:t>277</a:t>
                       </a:r>
                     </a:p>
                   </a:txBody>
@@ -5344,7 +5346,7 @@
                       <a:pPr algn="ctr"/>
                       <a:r>
                         <a:rPr b="1" sz="1000"/>
-                        <a:t>£96.93</a:t>
+                        <a:t>£96.55</a:t>
                       </a:r>
                     </a:p>
                   </a:txBody>
@@ -5551,7 +5553,7 @@
               </a:defRPr>
             </a:pPr>
             <a:r>
-              <a:t>Demand Gen generated 257 leads from £24,911.65 with a quarter CPL of £96.93.</a:t>
+              <a:t>Demand Gen generated 277 leads from £26,745.71 with a quarter CPL of £96.55.</a:t>
             </a:r>
           </a:p>
           <a:p>
@@ -5563,7 +5565,7 @@
               </a:defRPr>
             </a:pPr>
             <a:r>
-              <a:t>Best efficiency was in Jan (£91.56 CPL), while Mar was highest at £130.90.</a:t>
+              <a:t>Best efficiency was in Jan (£91.56 CPL), while Mar was highest at £110.27.</a:t>
             </a:r>
           </a:p>
           <a:p>
@@ -5575,7 +5577,7 @@
               </a:defRPr>
             </a:pPr>
             <a:r>
-              <a:t>YoY vs same quarter last year: leads +729.03%, spend +1267.38%.</a:t>
+              <a:t>YoY vs same quarter last year: leads +793.55%, spend +1368.05%.</a:t>
             </a:r>
           </a:p>
         </p:txBody>
@@ -5802,7 +5804,7 @@
               </a:defRPr>
             </a:pPr>
             <a:r>
-              <a:t>Other generated 65 leads from £0.00 with a quarter CPL of £0.00.</a:t>
+              <a:t>Other generated 79 leads from £0.00 with a quarter CPL of £0.00.</a:t>
             </a:r>
           </a:p>
           <a:p>
@@ -6373,7 +6375,7 @@
                       <a:pPr algn="ctr"/>
                       <a:r>
                         <a:rPr b="0" sz="1000"/>
-                        <a:t>8</a:t>
+                        <a:t>22</a:t>
                       </a:r>
                     </a:p>
                   </a:txBody>
@@ -6525,7 +6527,7 @@
                       <a:pPr algn="ctr"/>
                       <a:r>
                         <a:rPr b="1" sz="1000"/>
-                        <a:t>65</a:t>
+                        <a:t>79</a:t>
                       </a:r>
                     </a:p>
                   </a:txBody>
@@ -6750,7 +6752,7 @@
               </a:defRPr>
             </a:pPr>
             <a:r>
-              <a:t>Other generated 65 leads from £0.00 with a quarter CPL of £0.00.</a:t>
+              <a:t>Other generated 79 leads from £0.00 with a quarter CPL of £0.00.</a:t>
             </a:r>
           </a:p>
           <a:p>
@@ -7001,7 +7003,7 @@
               </a:defRPr>
             </a:pPr>
             <a:r>
-              <a:t>China generated 649 leads from £60,307.34 with a quarter CPL of £92.92.</a:t>
+              <a:t>China generated 771 leads from £73,705.74 with a quarter CPL of £95.60.</a:t>
             </a:r>
           </a:p>
           <a:p>
@@ -7025,7 +7027,7 @@
               </a:defRPr>
             </a:pPr>
             <a:r>
-              <a:t>YoY vs same quarter last year: leads -20.07%, spend +109.19%.</a:t>
+              <a:t>YoY vs same quarter last year: leads -5.05%, spend +155.66%.</a:t>
             </a:r>
           </a:p>
         </p:txBody>
@@ -7502,91 +7504,91 @@
                       <a:pPr algn="ctr"/>
                       <a:r>
                         <a:rPr b="0" sz="1000"/>
-                        <a:t>494,029</a:t>
-                      </a:r>
-                    </a:p>
-                  </a:txBody>
-                  <a:tcPr/>
-                </a:tc>
-                <a:tc>
-                  <a:txBody>
-                    <a:bodyPr/>
-                    <a:lstStyle/>
-                    <a:p>
-                      <a:pPr algn="ctr"/>
-                      <a:r>
-                        <a:rPr b="0" sz="1000"/>
-                        <a:t>4,899</a:t>
-                      </a:r>
-                    </a:p>
-                  </a:txBody>
-                  <a:tcPr/>
-                </a:tc>
-                <a:tc>
-                  <a:txBody>
-                    <a:bodyPr/>
-                    <a:lstStyle/>
-                    <a:p>
-                      <a:pPr algn="ctr"/>
-                      <a:r>
-                        <a:rPr b="0" sz="1000"/>
-                        <a:t>0.99%</a:t>
-                      </a:r>
-                    </a:p>
-                  </a:txBody>
-                  <a:tcPr/>
-                </a:tc>
-                <a:tc>
-                  <a:txBody>
-                    <a:bodyPr/>
-                    <a:lstStyle/>
-                    <a:p>
-                      <a:pPr algn="ctr"/>
-                      <a:r>
-                        <a:rPr b="0" sz="1000"/>
-                        <a:t>£1.17</a:t>
-                      </a:r>
-                    </a:p>
-                  </a:txBody>
-                  <a:tcPr/>
-                </a:tc>
-                <a:tc>
-                  <a:txBody>
-                    <a:bodyPr/>
-                    <a:lstStyle/>
-                    <a:p>
-                      <a:pPr algn="ctr"/>
-                      <a:r>
-                        <a:rPr b="0" sz="1000"/>
-                        <a:t>£5,729.23</a:t>
-                      </a:r>
-                    </a:p>
-                  </a:txBody>
-                  <a:tcPr/>
-                </a:tc>
-                <a:tc>
-                  <a:txBody>
-                    <a:bodyPr/>
-                    <a:lstStyle/>
-                    <a:p>
-                      <a:pPr algn="ctr"/>
-                      <a:r>
-                        <a:rPr b="0" sz="1000"/>
-                        <a:t>74</a:t>
-                      </a:r>
-                    </a:p>
-                  </a:txBody>
-                  <a:tcPr/>
-                </a:tc>
-                <a:tc>
-                  <a:txBody>
-                    <a:bodyPr/>
-                    <a:lstStyle/>
-                    <a:p>
-                      <a:pPr algn="ctr"/>
-                      <a:r>
-                        <a:rPr b="0" sz="1000"/>
-                        <a:t>£77.42</a:t>
+                        <a:t>1,069,902</a:t>
+                      </a:r>
+                    </a:p>
+                  </a:txBody>
+                  <a:tcPr/>
+                </a:tc>
+                <a:tc>
+                  <a:txBody>
+                    <a:bodyPr/>
+                    <a:lstStyle/>
+                    <a:p>
+                      <a:pPr algn="ctr"/>
+                      <a:r>
+                        <a:rPr b="0" sz="1000"/>
+                        <a:t>12,959</a:t>
+                      </a:r>
+                    </a:p>
+                  </a:txBody>
+                  <a:tcPr/>
+                </a:tc>
+                <a:tc>
+                  <a:txBody>
+                    <a:bodyPr/>
+                    <a:lstStyle/>
+                    <a:p>
+                      <a:pPr algn="ctr"/>
+                      <a:r>
+                        <a:rPr b="0" sz="1000"/>
+                        <a:t>1.21%</a:t>
+                      </a:r>
+                    </a:p>
+                  </a:txBody>
+                  <a:tcPr/>
+                </a:tc>
+                <a:tc>
+                  <a:txBody>
+                    <a:bodyPr/>
+                    <a:lstStyle/>
+                    <a:p>
+                      <a:pPr algn="ctr"/>
+                      <a:r>
+                        <a:rPr b="0" sz="1000"/>
+                        <a:t>£1.48</a:t>
+                      </a:r>
+                    </a:p>
+                  </a:txBody>
+                  <a:tcPr/>
+                </a:tc>
+                <a:tc>
+                  <a:txBody>
+                    <a:bodyPr/>
+                    <a:lstStyle/>
+                    <a:p>
+                      <a:pPr algn="ctr"/>
+                      <a:r>
+                        <a:rPr b="0" sz="1000"/>
+                        <a:t>£19,127.63</a:t>
+                      </a:r>
+                    </a:p>
+                  </a:txBody>
+                  <a:tcPr/>
+                </a:tc>
+                <a:tc>
+                  <a:txBody>
+                    <a:bodyPr/>
+                    <a:lstStyle/>
+                    <a:p>
+                      <a:pPr algn="ctr"/>
+                      <a:r>
+                        <a:rPr b="0" sz="1000"/>
+                        <a:t>196</a:t>
+                      </a:r>
+                    </a:p>
+                  </a:txBody>
+                  <a:tcPr/>
+                </a:tc>
+                <a:tc>
+                  <a:txBody>
+                    <a:bodyPr/>
+                    <a:lstStyle/>
+                    <a:p>
+                      <a:pPr algn="ctr"/>
+                      <a:r>
+                        <a:rPr b="0" sz="1000"/>
+                        <a:t>£97.59</a:t>
                       </a:r>
                     </a:p>
                   </a:txBody>
@@ -7634,7 +7636,7 @@
                       <a:pPr algn="ctr"/>
                       <a:r>
                         <a:rPr b="1" sz="1000"/>
-                        <a:t>3,067,519</a:t>
+                        <a:t>3,643,392</a:t>
                       </a:r>
                     </a:p>
                   </a:txBody>
@@ -7652,7 +7654,7 @@
                       <a:pPr algn="ctr"/>
                       <a:r>
                         <a:rPr b="1" sz="1000"/>
-                        <a:t>39,408</a:t>
+                        <a:t>47,468</a:t>
                       </a:r>
                     </a:p>
                   </a:txBody>
@@ -7670,7 +7672,7 @@
                       <a:pPr algn="ctr"/>
                       <a:r>
                         <a:rPr b="1" sz="1000"/>
-                        <a:t>1.28%</a:t>
+                        <a:t>1.30%</a:t>
                       </a:r>
                     </a:p>
                   </a:txBody>
@@ -7688,7 +7690,7 @@
                       <a:pPr algn="ctr"/>
                       <a:r>
                         <a:rPr b="1" sz="1000"/>
-                        <a:t>£1.53</a:t>
+                        <a:t>£1.55</a:t>
                       </a:r>
                     </a:p>
                   </a:txBody>
@@ -7706,7 +7708,7 @@
                       <a:pPr algn="ctr"/>
                       <a:r>
                         <a:rPr b="1" sz="1000"/>
-                        <a:t>£60,307.34</a:t>
+                        <a:t>£73,705.74</a:t>
                       </a:r>
                     </a:p>
                   </a:txBody>
@@ -7724,7 +7726,7 @@
                       <a:pPr algn="ctr"/>
                       <a:r>
                         <a:rPr b="1" sz="1000"/>
-                        <a:t>649</a:t>
+                        <a:t>771</a:t>
                       </a:r>
                     </a:p>
                   </a:txBody>
@@ -7742,7 +7744,7 @@
                       <a:pPr algn="ctr"/>
                       <a:r>
                         <a:rPr b="1" sz="1000"/>
-                        <a:t>£92.92</a:t>
+                        <a:t>£95.60</a:t>
                       </a:r>
                     </a:p>
                   </a:txBody>
@@ -7760,7 +7762,7 @@
                       <a:pPr algn="ctr"/>
                       <a:r>
                         <a:rPr b="1" sz="1000"/>
-                        <a:t>1.65%</a:t>
+                        <a:t>1.62%</a:t>
                       </a:r>
                     </a:p>
                   </a:txBody>
@@ -7949,7 +7951,7 @@
               </a:defRPr>
             </a:pPr>
             <a:r>
-              <a:t>China generated 649 leads from £60,307.34 with a quarter CPL of £92.92.</a:t>
+              <a:t>China generated 771 leads from £73,705.74 with a quarter CPL of £95.60.</a:t>
             </a:r>
           </a:p>
           <a:p>
@@ -7973,7 +7975,7 @@
               </a:defRPr>
             </a:pPr>
             <a:r>
-              <a:t>YoY vs same quarter last year: leads -20.07%, spend +109.19%.</a:t>
+              <a:t>YoY vs same quarter last year: leads -5.05%, spend +155.66%.</a:t>
             </a:r>
           </a:p>
         </p:txBody>
@@ -8200,7 +8202,7 @@
               </a:defRPr>
             </a:pPr>
             <a:r>
-              <a:t>Generic represented the largest share of spend (68.6%).</a:t>
+              <a:t>Generic represented the largest share of spend (69.7%).</a:t>
             </a:r>
           </a:p>
           <a:p>
@@ -8212,7 +8214,7 @@
               </a:defRPr>
             </a:pPr>
             <a:r>
-              <a:t>Generic delivered the largest share of leads (52.1%).</a:t>
+              <a:t>Generic delivered the largest share of leads (51.9%).</a:t>
             </a:r>
           </a:p>
         </p:txBody>
@@ -8439,7 +8441,7 @@
               </a:defRPr>
             </a:pPr>
             <a:r>
-              <a:t>Japan generated 597 leads from £55,262.22 with a quarter CPL of £92.57.</a:t>
+              <a:t>Japan generated 674 leads from £61,385.22 with a quarter CPL of £91.08.</a:t>
             </a:r>
           </a:p>
           <a:p>
@@ -8451,7 +8453,7 @@
               </a:defRPr>
             </a:pPr>
             <a:r>
-              <a:t>Best efficiency was in Mar (£88.00 CPL), while Feb was highest at £95.95.</a:t>
+              <a:t>Best efficiency was in Mar (£82.60 CPL), while Feb was highest at £95.95.</a:t>
             </a:r>
           </a:p>
           <a:p>
@@ -8463,7 +8465,7 @@
               </a:defRPr>
             </a:pPr>
             <a:r>
-              <a:t>YoY vs same quarter last year: leads -21.03%, spend +6.47%.</a:t>
+              <a:t>YoY vs same quarter last year: leads -10.85%, spend +18.27%.</a:t>
             </a:r>
           </a:p>
         </p:txBody>
@@ -8940,105 +8942,105 @@
                       <a:pPr algn="ctr"/>
                       <a:r>
                         <a:rPr b="0" sz="1000"/>
-                        <a:t>355,816</a:t>
-                      </a:r>
-                    </a:p>
-                  </a:txBody>
-                  <a:tcPr/>
-                </a:tc>
-                <a:tc>
-                  <a:txBody>
-                    <a:bodyPr/>
-                    <a:lstStyle/>
-                    <a:p>
-                      <a:pPr algn="ctr"/>
-                      <a:r>
-                        <a:rPr b="0" sz="1000"/>
-                        <a:t>2,674</a:t>
-                      </a:r>
-                    </a:p>
-                  </a:txBody>
-                  <a:tcPr/>
-                </a:tc>
-                <a:tc>
-                  <a:txBody>
-                    <a:bodyPr/>
-                    <a:lstStyle/>
-                    <a:p>
-                      <a:pPr algn="ctr"/>
-                      <a:r>
-                        <a:rPr b="0" sz="1000"/>
-                        <a:t>0.75%</a:t>
-                      </a:r>
-                    </a:p>
-                  </a:txBody>
-                  <a:tcPr/>
-                </a:tc>
-                <a:tc>
-                  <a:txBody>
-                    <a:bodyPr/>
-                    <a:lstStyle/>
-                    <a:p>
-                      <a:pPr algn="ctr"/>
-                      <a:r>
-                        <a:rPr b="0" sz="1000"/>
-                        <a:t>£1.45</a:t>
-                      </a:r>
-                    </a:p>
-                  </a:txBody>
-                  <a:tcPr/>
-                </a:tc>
-                <a:tc>
-                  <a:txBody>
-                    <a:bodyPr/>
-                    <a:lstStyle/>
-                    <a:p>
-                      <a:pPr algn="ctr"/>
-                      <a:r>
-                        <a:rPr b="0" sz="1000"/>
-                        <a:t>£3,871.90</a:t>
-                      </a:r>
-                    </a:p>
-                  </a:txBody>
-                  <a:tcPr/>
-                </a:tc>
-                <a:tc>
-                  <a:txBody>
-                    <a:bodyPr/>
-                    <a:lstStyle/>
-                    <a:p>
-                      <a:pPr algn="ctr"/>
-                      <a:r>
-                        <a:rPr b="0" sz="1000"/>
-                        <a:t>44</a:t>
-                      </a:r>
-                    </a:p>
-                  </a:txBody>
-                  <a:tcPr/>
-                </a:tc>
-                <a:tc>
-                  <a:txBody>
-                    <a:bodyPr/>
-                    <a:lstStyle/>
-                    <a:p>
-                      <a:pPr algn="ctr"/>
-                      <a:r>
-                        <a:rPr b="0" sz="1000"/>
-                        <a:t>£88.00</a:t>
-                      </a:r>
-                    </a:p>
-                  </a:txBody>
-                  <a:tcPr/>
-                </a:tc>
-                <a:tc>
-                  <a:txBody>
-                    <a:bodyPr/>
-                    <a:lstStyle/>
-                    <a:p>
-                      <a:pPr algn="ctr"/>
-                      <a:r>
-                        <a:rPr b="0" sz="1000"/>
-                        <a:t>1.65%</a:t>
+                        <a:t>594,709</a:t>
+                      </a:r>
+                    </a:p>
+                  </a:txBody>
+                  <a:tcPr/>
+                </a:tc>
+                <a:tc>
+                  <a:txBody>
+                    <a:bodyPr/>
+                    <a:lstStyle/>
+                    <a:p>
+                      <a:pPr algn="ctr"/>
+                      <a:r>
+                        <a:rPr b="0" sz="1000"/>
+                        <a:t>7,425</a:t>
+                      </a:r>
+                    </a:p>
+                  </a:txBody>
+                  <a:tcPr/>
+                </a:tc>
+                <a:tc>
+                  <a:txBody>
+                    <a:bodyPr/>
+                    <a:lstStyle/>
+                    <a:p>
+                      <a:pPr algn="ctr"/>
+                      <a:r>
+                        <a:rPr b="0" sz="1000"/>
+                        <a:t>1.25%</a:t>
+                      </a:r>
+                    </a:p>
+                  </a:txBody>
+                  <a:tcPr/>
+                </a:tc>
+                <a:tc>
+                  <a:txBody>
+                    <a:bodyPr/>
+                    <a:lstStyle/>
+                    <a:p>
+                      <a:pPr algn="ctr"/>
+                      <a:r>
+                        <a:rPr b="0" sz="1000"/>
+                        <a:t>£1.35</a:t>
+                      </a:r>
+                    </a:p>
+                  </a:txBody>
+                  <a:tcPr/>
+                </a:tc>
+                <a:tc>
+                  <a:txBody>
+                    <a:bodyPr/>
+                    <a:lstStyle/>
+                    <a:p>
+                      <a:pPr algn="ctr"/>
+                      <a:r>
+                        <a:rPr b="0" sz="1000"/>
+                        <a:t>£9,994.90</a:t>
+                      </a:r>
+                    </a:p>
+                  </a:txBody>
+                  <a:tcPr/>
+                </a:tc>
+                <a:tc>
+                  <a:txBody>
+                    <a:bodyPr/>
+                    <a:lstStyle/>
+                    <a:p>
+                      <a:pPr algn="ctr"/>
+                      <a:r>
+                        <a:rPr b="0" sz="1000"/>
+                        <a:t>121</a:t>
+                      </a:r>
+                    </a:p>
+                  </a:txBody>
+                  <a:tcPr/>
+                </a:tc>
+                <a:tc>
+                  <a:txBody>
+                    <a:bodyPr/>
+                    <a:lstStyle/>
+                    <a:p>
+                      <a:pPr algn="ctr"/>
+                      <a:r>
+                        <a:rPr b="0" sz="1000"/>
+                        <a:t>£82.60</a:t>
+                      </a:r>
+                    </a:p>
+                  </a:txBody>
+                  <a:tcPr/>
+                </a:tc>
+                <a:tc>
+                  <a:txBody>
+                    <a:bodyPr/>
+                    <a:lstStyle/>
+                    <a:p>
+                      <a:pPr algn="ctr"/>
+                      <a:r>
+                        <a:rPr b="0" sz="1000"/>
+                        <a:t>1.63%</a:t>
                       </a:r>
                     </a:p>
                   </a:txBody>
@@ -9072,7 +9074,7 @@
                       <a:pPr algn="ctr"/>
                       <a:r>
                         <a:rPr b="1" sz="1000"/>
-                        <a:t>2,953,279</a:t>
+                        <a:t>3,192,172</a:t>
                       </a:r>
                     </a:p>
                   </a:txBody>
@@ -9090,7 +9092,7 @@
                       <a:pPr algn="ctr"/>
                       <a:r>
                         <a:rPr b="1" sz="1000"/>
-                        <a:t>36,295</a:t>
+                        <a:t>41,046</a:t>
                       </a:r>
                     </a:p>
                   </a:txBody>
@@ -9108,7 +9110,7 @@
                       <a:pPr algn="ctr"/>
                       <a:r>
                         <a:rPr b="1" sz="1000"/>
-                        <a:t>1.23%</a:t>
+                        <a:t>1.29%</a:t>
                       </a:r>
                     </a:p>
                   </a:txBody>
@@ -9126,7 +9128,7 @@
                       <a:pPr algn="ctr"/>
                       <a:r>
                         <a:rPr b="1" sz="1000"/>
-                        <a:t>£1.52</a:t>
+                        <a:t>£1.50</a:t>
                       </a:r>
                     </a:p>
                   </a:txBody>
@@ -9144,7 +9146,7 @@
                       <a:pPr algn="ctr"/>
                       <a:r>
                         <a:rPr b="1" sz="1000"/>
-                        <a:t>£55,262.22</a:t>
+                        <a:t>£61,385.22</a:t>
                       </a:r>
                     </a:p>
                   </a:txBody>
@@ -9162,7 +9164,7 @@
                       <a:pPr algn="ctr"/>
                       <a:r>
                         <a:rPr b="1" sz="1000"/>
-                        <a:t>597</a:t>
+                        <a:t>674</a:t>
                       </a:r>
                     </a:p>
                   </a:txBody>
@@ -9180,7 +9182,7 @@
                       <a:pPr algn="ctr"/>
                       <a:r>
                         <a:rPr b="1" sz="1000"/>
-                        <a:t>£92.57</a:t>
+                        <a:t>£91.08</a:t>
                       </a:r>
                     </a:p>
                   </a:txBody>
@@ -9479,7 +9481,7 @@
               </a:defRPr>
             </a:pPr>
             <a:r>
-              <a:t>Japan generated 597 leads from £55,262.22 with a quarter CPL of £92.57.</a:t>
+              <a:t>Japan generated 674 leads from £61,385.22 with a quarter CPL of £91.08.</a:t>
             </a:r>
           </a:p>
           <a:p>
@@ -9491,7 +9493,7 @@
               </a:defRPr>
             </a:pPr>
             <a:r>
-              <a:t>Best efficiency was in Mar (£88.00 CPL), while Feb was highest at £95.95.</a:t>
+              <a:t>Best efficiency was in Mar (£82.60 CPL), while Feb was highest at £95.95.</a:t>
             </a:r>
           </a:p>
           <a:p>
@@ -9503,7 +9505,7 @@
               </a:defRPr>
             </a:pPr>
             <a:r>
-              <a:t>YoY vs same quarter last year: leads -21.03%, spend +6.47%.</a:t>
+              <a:t>YoY vs same quarter last year: leads -10.85%, spend +18.27%.</a:t>
             </a:r>
           </a:p>
         </p:txBody>
@@ -9730,7 +9732,7 @@
               </a:defRPr>
             </a:pPr>
             <a:r>
-              <a:t>Generic represented the largest share of spend (70.4%).</a:t>
+              <a:t>Generic represented the largest share of spend (70.9%).</a:t>
             </a:r>
           </a:p>
           <a:p>
@@ -9742,7 +9744,7 @@
               </a:defRPr>
             </a:pPr>
             <a:r>
-              <a:t>Generic delivered the largest share of leads (60.6%).</a:t>
+              <a:t>Generic delivered the largest share of leads (60.4%).</a:t>
             </a:r>
           </a:p>
         </p:txBody>
@@ -9969,7 +9971,7 @@
               </a:defRPr>
             </a:pPr>
             <a:r>
-              <a:t>SE Asia generated 242 leads from £25,322.38 with a quarter CPL of £104.64.</a:t>
+              <a:t>SE Asia generated 271 leads from £28,118.12 with a quarter CPL of £103.76.</a:t>
             </a:r>
           </a:p>
           <a:p>
@@ -9981,7 +9983,7 @@
               </a:defRPr>
             </a:pPr>
             <a:r>
-              <a:t>Best efficiency was in Feb (£99.47 CPL), while Mar was highest at £111.46.</a:t>
+              <a:t>Best efficiency was in Feb (£99.47 CPL), while Jan was highest at £107.56.</a:t>
             </a:r>
           </a:p>
           <a:p>
@@ -9993,7 +9995,7 @@
               </a:defRPr>
             </a:pPr>
             <a:r>
-              <a:t>YoY vs same quarter last year: leads -40.69%, spend +1.00%.</a:t>
+              <a:t>YoY vs same quarter last year: leads -33.58%, spend +12.15%.</a:t>
             </a:r>
           </a:p>
         </p:txBody>
@@ -10470,105 +10472,105 @@
                       <a:pPr algn="ctr"/>
                       <a:r>
                         <a:rPr b="0" sz="1000"/>
-                        <a:t>166,502</a:t>
-                      </a:r>
-                    </a:p>
-                  </a:txBody>
-                  <a:tcPr/>
-                </a:tc>
-                <a:tc>
-                  <a:txBody>
-                    <a:bodyPr/>
-                    <a:lstStyle/>
-                    <a:p>
-                      <a:pPr algn="ctr"/>
-                      <a:r>
-                        <a:rPr b="0" sz="1000"/>
-                        <a:t>2,007</a:t>
-                      </a:r>
-                    </a:p>
-                  </a:txBody>
-                  <a:tcPr/>
-                </a:tc>
-                <a:tc>
-                  <a:txBody>
-                    <a:bodyPr/>
-                    <a:lstStyle/>
-                    <a:p>
-                      <a:pPr algn="ctr"/>
-                      <a:r>
-                        <a:rPr b="0" sz="1000"/>
-                        <a:t>1.21%</a:t>
-                      </a:r>
-                    </a:p>
-                  </a:txBody>
-                  <a:tcPr/>
-                </a:tc>
-                <a:tc>
-                  <a:txBody>
-                    <a:bodyPr/>
-                    <a:lstStyle/>
-                    <a:p>
-                      <a:pPr algn="ctr"/>
-                      <a:r>
-                        <a:rPr b="0" sz="1000"/>
-                        <a:t>£1.33</a:t>
-                      </a:r>
-                    </a:p>
-                  </a:txBody>
-                  <a:tcPr/>
-                </a:tc>
-                <a:tc>
-                  <a:txBody>
-                    <a:bodyPr/>
-                    <a:lstStyle/>
-                    <a:p>
-                      <a:pPr algn="ctr"/>
-                      <a:r>
-                        <a:rPr b="0" sz="1000"/>
-                        <a:t>£2,675.11</a:t>
-                      </a:r>
-                    </a:p>
-                  </a:txBody>
-                  <a:tcPr/>
-                </a:tc>
-                <a:tc>
-                  <a:txBody>
-                    <a:bodyPr/>
-                    <a:lstStyle/>
-                    <a:p>
-                      <a:pPr algn="ctr"/>
-                      <a:r>
-                        <a:rPr b="0" sz="1000"/>
-                        <a:t>24</a:t>
-                      </a:r>
-                    </a:p>
-                  </a:txBody>
-                  <a:tcPr/>
-                </a:tc>
-                <a:tc>
-                  <a:txBody>
-                    <a:bodyPr/>
-                    <a:lstStyle/>
-                    <a:p>
-                      <a:pPr algn="ctr"/>
-                      <a:r>
-                        <a:rPr b="0" sz="1000"/>
-                        <a:t>£111.46</a:t>
-                      </a:r>
-                    </a:p>
-                  </a:txBody>
-                  <a:tcPr/>
-                </a:tc>
-                <a:tc>
-                  <a:txBody>
-                    <a:bodyPr/>
-                    <a:lstStyle/>
-                    <a:p>
-                      <a:pPr algn="ctr"/>
-                      <a:r>
-                        <a:rPr b="0" sz="1000"/>
-                        <a:t>1.20%</a:t>
+                        <a:t>237,896</a:t>
+                      </a:r>
+                    </a:p>
+                  </a:txBody>
+                  <a:tcPr/>
+                </a:tc>
+                <a:tc>
+                  <a:txBody>
+                    <a:bodyPr/>
+                    <a:lstStyle/>
+                    <a:p>
+                      <a:pPr algn="ctr"/>
+                      <a:r>
+                        <a:rPr b="0" sz="1000"/>
+                        <a:t>3,782</a:t>
+                      </a:r>
+                    </a:p>
+                  </a:txBody>
+                  <a:tcPr/>
+                </a:tc>
+                <a:tc>
+                  <a:txBody>
+                    <a:bodyPr/>
+                    <a:lstStyle/>
+                    <a:p>
+                      <a:pPr algn="ctr"/>
+                      <a:r>
+                        <a:rPr b="0" sz="1000"/>
+                        <a:t>1.59%</a:t>
+                      </a:r>
+                    </a:p>
+                  </a:txBody>
+                  <a:tcPr/>
+                </a:tc>
+                <a:tc>
+                  <a:txBody>
+                    <a:bodyPr/>
+                    <a:lstStyle/>
+                    <a:p>
+                      <a:pPr algn="ctr"/>
+                      <a:r>
+                        <a:rPr b="0" sz="1000"/>
+                        <a:t>£1.45</a:t>
+                      </a:r>
+                    </a:p>
+                  </a:txBody>
+                  <a:tcPr/>
+                </a:tc>
+                <a:tc>
+                  <a:txBody>
+                    <a:bodyPr/>
+                    <a:lstStyle/>
+                    <a:p>
+                      <a:pPr algn="ctr"/>
+                      <a:r>
+                        <a:rPr b="0" sz="1000"/>
+                        <a:t>£5,470.85</a:t>
+                      </a:r>
+                    </a:p>
+                  </a:txBody>
+                  <a:tcPr/>
+                </a:tc>
+                <a:tc>
+                  <a:txBody>
+                    <a:bodyPr/>
+                    <a:lstStyle/>
+                    <a:p>
+                      <a:pPr algn="ctr"/>
+                      <a:r>
+                        <a:rPr b="0" sz="1000"/>
+                        <a:t>53</a:t>
+                      </a:r>
+                    </a:p>
+                  </a:txBody>
+                  <a:tcPr/>
+                </a:tc>
+                <a:tc>
+                  <a:txBody>
+                    <a:bodyPr/>
+                    <a:lstStyle/>
+                    <a:p>
+                      <a:pPr algn="ctr"/>
+                      <a:r>
+                        <a:rPr b="0" sz="1000"/>
+                        <a:t>£103.22</a:t>
+                      </a:r>
+                    </a:p>
+                  </a:txBody>
+                  <a:tcPr/>
+                </a:tc>
+                <a:tc>
+                  <a:txBody>
+                    <a:bodyPr/>
+                    <a:lstStyle/>
+                    <a:p>
+                      <a:pPr algn="ctr"/>
+                      <a:r>
+                        <a:rPr b="0" sz="1000"/>
+                        <a:t>1.40%</a:t>
                       </a:r>
                     </a:p>
                   </a:txBody>
@@ -10602,7 +10604,7 @@
                       <a:pPr algn="ctr"/>
                       <a:r>
                         <a:rPr b="1" sz="1000"/>
-                        <a:t>1,913,688</a:t>
+                        <a:t>1,985,082</a:t>
                       </a:r>
                     </a:p>
                   </a:txBody>
@@ -10620,7 +10622,7 @@
                       <a:pPr algn="ctr"/>
                       <a:r>
                         <a:rPr b="1" sz="1000"/>
-                        <a:t>20,507</a:t>
+                        <a:t>22,282</a:t>
                       </a:r>
                     </a:p>
                   </a:txBody>
@@ -10638,7 +10640,7 @@
                       <a:pPr algn="ctr"/>
                       <a:r>
                         <a:rPr b="1" sz="1000"/>
-                        <a:t>1.07%</a:t>
+                        <a:t>1.12%</a:t>
                       </a:r>
                     </a:p>
                   </a:txBody>
@@ -10656,7 +10658,7 @@
                       <a:pPr algn="ctr"/>
                       <a:r>
                         <a:rPr b="1" sz="1000"/>
-                        <a:t>£1.23</a:t>
+                        <a:t>£1.26</a:t>
                       </a:r>
                     </a:p>
                   </a:txBody>
@@ -10674,7 +10676,7 @@
                       <a:pPr algn="ctr"/>
                       <a:r>
                         <a:rPr b="1" sz="1000"/>
-                        <a:t>£25,322.38</a:t>
+                        <a:t>£28,118.12</a:t>
                       </a:r>
                     </a:p>
                   </a:txBody>
@@ -10692,7 +10694,7 @@
                       <a:pPr algn="ctr"/>
                       <a:r>
                         <a:rPr b="1" sz="1000"/>
-                        <a:t>242</a:t>
+                        <a:t>271</a:t>
                       </a:r>
                     </a:p>
                   </a:txBody>
@@ -10710,7 +10712,7 @@
                       <a:pPr algn="ctr"/>
                       <a:r>
                         <a:rPr b="1" sz="1000"/>
-                        <a:t>£104.64</a:t>
+                        <a:t>£103.76</a:t>
                       </a:r>
                     </a:p>
                   </a:txBody>
@@ -10728,7 +10730,7 @@
                       <a:pPr algn="ctr"/>
                       <a:r>
                         <a:rPr b="1" sz="1000"/>
-                        <a:t>1.18%</a:t>
+                        <a:t>1.22%</a:t>
                       </a:r>
                     </a:p>
                   </a:txBody>
@@ -10917,7 +10919,7 @@
               </a:defRPr>
             </a:pPr>
             <a:r>
-              <a:t>SE Asia generated 242 leads from £25,322.38 with a quarter CPL of £104.64.</a:t>
+              <a:t>SE Asia generated 271 leads from £28,118.12 with a quarter CPL of £103.76.</a:t>
             </a:r>
           </a:p>
           <a:p>
@@ -10929,7 +10931,7 @@
               </a:defRPr>
             </a:pPr>
             <a:r>
-              <a:t>Best efficiency was in Feb (£99.47 CPL), while Mar was highest at £111.46.</a:t>
+              <a:t>Best efficiency was in Feb (£99.47 CPL), while Jan was highest at £107.56.</a:t>
             </a:r>
           </a:p>
           <a:p>
@@ -10941,7 +10943,7 @@
               </a:defRPr>
             </a:pPr>
             <a:r>
-              <a:t>YoY vs same quarter last year: leads -40.69%, spend +1.00%.</a:t>
+              <a:t>YoY vs same quarter last year: leads -33.58%, spend +12.15%.</a:t>
             </a:r>
           </a:p>
         </p:txBody>
@@ -11168,7 +11170,7 @@
               </a:defRPr>
             </a:pPr>
             <a:r>
-              <a:t>Generic represented the largest share of spend (57.1%).</a:t>
+              <a:t>Generic represented the largest share of spend (59.7%).</a:t>
             </a:r>
           </a:p>
           <a:p>
@@ -11180,7 +11182,7 @@
               </a:defRPr>
             </a:pPr>
             <a:r>
-              <a:t>Generic delivered the largest share of leads (49.2%).</a:t>
+              <a:t>Generic delivered the largest share of leads (52.0%).</a:t>
             </a:r>
           </a:p>
         </p:txBody>
@@ -11407,7 +11409,7 @@
               </a:defRPr>
             </a:pPr>
             <a:r>
-              <a:t>India generated 200 leads from £19,592.43 with a quarter CPL of £97.96.</a:t>
+              <a:t>India generated 225 leads from £22,820.53 with a quarter CPL of £101.42.</a:t>
             </a:r>
           </a:p>
           <a:p>
@@ -11419,7 +11421,7 @@
               </a:defRPr>
             </a:pPr>
             <a:r>
-              <a:t>Best efficiency was in Jan (£76.00 CPL), while Mar was highest at £135.00.</a:t>
+              <a:t>Best efficiency was in Jan (£76.00 CPL), while Mar was highest at £131.42.</a:t>
             </a:r>
           </a:p>
           <a:p>
@@ -11431,7 +11433,7 @@
               </a:defRPr>
             </a:pPr>
             <a:r>
-              <a:t>YoY vs same quarter last year: leads -48.72%, spend +0.90%.</a:t>
+              <a:t>YoY vs same quarter last year: leads -42.31%, spend +17.52%.</a:t>
             </a:r>
           </a:p>
         </p:txBody>
@@ -11908,105 +11910,105 @@
                       <a:pPr algn="ctr"/>
                       <a:r>
                         <a:rPr b="0" sz="1000"/>
-                        <a:t>98,163</a:t>
-                      </a:r>
-                    </a:p>
-                  </a:txBody>
-                  <a:tcPr/>
-                </a:tc>
-                <a:tc>
-                  <a:txBody>
-                    <a:bodyPr/>
-                    <a:lstStyle/>
-                    <a:p>
-                      <a:pPr algn="ctr"/>
-                      <a:r>
-                        <a:rPr b="0" sz="1000"/>
-                        <a:t>1,313</a:t>
-                      </a:r>
-                    </a:p>
-                  </a:txBody>
-                  <a:tcPr/>
-                </a:tc>
-                <a:tc>
-                  <a:txBody>
-                    <a:bodyPr/>
-                    <a:lstStyle/>
-                    <a:p>
-                      <a:pPr algn="ctr"/>
-                      <a:r>
-                        <a:rPr b="0" sz="1000"/>
-                        <a:t>1.34%</a:t>
-                      </a:r>
-                    </a:p>
-                  </a:txBody>
-                  <a:tcPr/>
-                </a:tc>
-                <a:tc>
-                  <a:txBody>
-                    <a:bodyPr/>
-                    <a:lstStyle/>
-                    <a:p>
-                      <a:pPr algn="ctr"/>
-                      <a:r>
-                        <a:rPr b="0" sz="1000"/>
-                        <a:t>£1.65</a:t>
-                      </a:r>
-                    </a:p>
-                  </a:txBody>
-                  <a:tcPr/>
-                </a:tc>
-                <a:tc>
-                  <a:txBody>
-                    <a:bodyPr/>
-                    <a:lstStyle/>
-                    <a:p>
-                      <a:pPr algn="ctr"/>
-                      <a:r>
-                        <a:rPr b="0" sz="1000"/>
-                        <a:t>£2,159.93</a:t>
-                      </a:r>
-                    </a:p>
-                  </a:txBody>
-                  <a:tcPr/>
-                </a:tc>
-                <a:tc>
-                  <a:txBody>
-                    <a:bodyPr/>
-                    <a:lstStyle/>
-                    <a:p>
-                      <a:pPr algn="ctr"/>
-                      <a:r>
-                        <a:rPr b="0" sz="1000"/>
-                        <a:t>16</a:t>
-                      </a:r>
-                    </a:p>
-                  </a:txBody>
-                  <a:tcPr/>
-                </a:tc>
-                <a:tc>
-                  <a:txBody>
-                    <a:bodyPr/>
-                    <a:lstStyle/>
-                    <a:p>
-                      <a:pPr algn="ctr"/>
-                      <a:r>
-                        <a:rPr b="0" sz="1000"/>
-                        <a:t>£135.00</a:t>
-                      </a:r>
-                    </a:p>
-                  </a:txBody>
-                  <a:tcPr/>
-                </a:tc>
-                <a:tc>
-                  <a:txBody>
-                    <a:bodyPr/>
-                    <a:lstStyle/>
-                    <a:p>
-                      <a:pPr algn="ctr"/>
-                      <a:r>
-                        <a:rPr b="0" sz="1000"/>
-                        <a:t>1.22%</a:t>
+                        <a:t>187,767</a:t>
+                      </a:r>
+                    </a:p>
+                  </a:txBody>
+                  <a:tcPr/>
+                </a:tc>
+                <a:tc>
+                  <a:txBody>
+                    <a:bodyPr/>
+                    <a:lstStyle/>
+                    <a:p>
+                      <a:pPr algn="ctr"/>
+                      <a:r>
+                        <a:rPr b="0" sz="1000"/>
+                        <a:t>2,968</a:t>
+                      </a:r>
+                    </a:p>
+                  </a:txBody>
+                  <a:tcPr/>
+                </a:tc>
+                <a:tc>
+                  <a:txBody>
+                    <a:bodyPr/>
+                    <a:lstStyle/>
+                    <a:p>
+                      <a:pPr algn="ctr"/>
+                      <a:r>
+                        <a:rPr b="0" sz="1000"/>
+                        <a:t>1.58%</a:t>
+                      </a:r>
+                    </a:p>
+                  </a:txBody>
+                  <a:tcPr/>
+                </a:tc>
+                <a:tc>
+                  <a:txBody>
+                    <a:bodyPr/>
+                    <a:lstStyle/>
+                    <a:p>
+                      <a:pPr algn="ctr"/>
+                      <a:r>
+                        <a:rPr b="0" sz="1000"/>
+                        <a:t>£1.82</a:t>
+                      </a:r>
+                    </a:p>
+                  </a:txBody>
+                  <a:tcPr/>
+                </a:tc>
+                <a:tc>
+                  <a:txBody>
+                    <a:bodyPr/>
+                    <a:lstStyle/>
+                    <a:p>
+                      <a:pPr algn="ctr"/>
+                      <a:r>
+                        <a:rPr b="0" sz="1000"/>
+                        <a:t>£5,388.04</a:t>
+                      </a:r>
+                    </a:p>
+                  </a:txBody>
+                  <a:tcPr/>
+                </a:tc>
+                <a:tc>
+                  <a:txBody>
+                    <a:bodyPr/>
+                    <a:lstStyle/>
+                    <a:p>
+                      <a:pPr algn="ctr"/>
+                      <a:r>
+                        <a:rPr b="0" sz="1000"/>
+                        <a:t>41</a:t>
+                      </a:r>
+                    </a:p>
+                  </a:txBody>
+                  <a:tcPr/>
+                </a:tc>
+                <a:tc>
+                  <a:txBody>
+                    <a:bodyPr/>
+                    <a:lstStyle/>
+                    <a:p>
+                      <a:pPr algn="ctr"/>
+                      <a:r>
+                        <a:rPr b="0" sz="1000"/>
+                        <a:t>£131.42</a:t>
+                      </a:r>
+                    </a:p>
+                  </a:txBody>
+                  <a:tcPr/>
+                </a:tc>
+                <a:tc>
+                  <a:txBody>
+                    <a:bodyPr/>
+                    <a:lstStyle/>
+                    <a:p>
+                      <a:pPr algn="ctr"/>
+                      <a:r>
+                        <a:rPr b="0" sz="1000"/>
+                        <a:t>1.38%</a:t>
                       </a:r>
                     </a:p>
                   </a:txBody>
@@ -12040,7 +12042,7 @@
                       <a:pPr algn="ctr"/>
                       <a:r>
                         <a:rPr b="1" sz="1000"/>
-                        <a:t>1,907,192</a:t>
+                        <a:t>1,996,796</a:t>
                       </a:r>
                     </a:p>
                   </a:txBody>
@@ -12058,7 +12060,7 @@
                       <a:pPr algn="ctr"/>
                       <a:r>
                         <a:rPr b="1" sz="1000"/>
-                        <a:t>13,448</a:t>
+                        <a:t>15,103</a:t>
                       </a:r>
                     </a:p>
                   </a:txBody>
@@ -12076,7 +12078,7 @@
                       <a:pPr algn="ctr"/>
                       <a:r>
                         <a:rPr b="1" sz="1000"/>
-                        <a:t>0.71%</a:t>
+                        <a:t>0.76%</a:t>
                       </a:r>
                     </a:p>
                   </a:txBody>
@@ -12094,7 +12096,7 @@
                       <a:pPr algn="ctr"/>
                       <a:r>
                         <a:rPr b="1" sz="1000"/>
-                        <a:t>£1.46</a:t>
+                        <a:t>£1.51</a:t>
                       </a:r>
                     </a:p>
                   </a:txBody>
@@ -12112,7 +12114,7 @@
                       <a:pPr algn="ctr"/>
                       <a:r>
                         <a:rPr b="1" sz="1000"/>
-                        <a:t>£19,592.43</a:t>
+                        <a:t>£22,820.53</a:t>
                       </a:r>
                     </a:p>
                   </a:txBody>
@@ -12130,7 +12132,7 @@
                       <a:pPr algn="ctr"/>
                       <a:r>
                         <a:rPr b="1" sz="1000"/>
-                        <a:t>200</a:t>
+                        <a:t>225</a:t>
                       </a:r>
                     </a:p>
                   </a:txBody>
@@ -12148,7 +12150,7 @@
                       <a:pPr algn="ctr"/>
                       <a:r>
                         <a:rPr b="1" sz="1000"/>
-                        <a:t>£97.96</a:t>
+                        <a:t>£101.42</a:t>
                       </a:r>
                     </a:p>
                   </a:txBody>
@@ -12355,7 +12357,7 @@
               </a:defRPr>
             </a:pPr>
             <a:r>
-              <a:t>India generated 200 leads from £19,592.43 with a quarter CPL of £97.96.</a:t>
+              <a:t>India generated 225 leads from £22,820.53 with a quarter CPL of £101.42.</a:t>
             </a:r>
           </a:p>
           <a:p>
@@ -12367,7 +12369,7 @@
               </a:defRPr>
             </a:pPr>
             <a:r>
-              <a:t>Best efficiency was in Jan (£76.00 CPL), while Mar was highest at £135.00.</a:t>
+              <a:t>Best efficiency was in Jan (£76.00 CPL), while Mar was highest at £131.42.</a:t>
             </a:r>
           </a:p>
           <a:p>
@@ -12379,7 +12381,7 @@
               </a:defRPr>
             </a:pPr>
             <a:r>
-              <a:t>YoY vs same quarter last year: leads -48.72%, spend +0.90%.</a:t>
+              <a:t>YoY vs same quarter last year: leads -42.31%, spend +17.52%.</a:t>
             </a:r>
           </a:p>
         </p:txBody>
@@ -12606,7 +12608,7 @@
               </a:defRPr>
             </a:pPr>
             <a:r>
-              <a:t>Generic represented the largest share of spend (57.9%).</a:t>
+              <a:t>Generic represented the largest share of spend (61.0%).</a:t>
             </a:r>
           </a:p>
           <a:p>
@@ -12618,7 +12620,7 @@
               </a:defRPr>
             </a:pPr>
             <a:r>
-              <a:t>Generic delivered the largest share of leads (52.0%).</a:t>
+              <a:t>Generic delivered the largest share of leads (53.3%).</a:t>
             </a:r>
           </a:p>
         </p:txBody>
@@ -12845,7 +12847,7 @@
               </a:defRPr>
             </a:pPr>
             <a:r>
-              <a:t>Other generated 3,034 leads from £30,289.42 with a quarter CPL of £9.98.</a:t>
+              <a:t>Other generated 3,691 leads from £36,581.70 with a quarter CPL of £9.91.</a:t>
             </a:r>
           </a:p>
           <a:p>
@@ -12869,7 +12871,7 @@
               </a:defRPr>
             </a:pPr>
             <a:r>
-              <a:t>YoY vs same quarter last year: leads +162.00%, spend +22.14%.</a:t>
+              <a:t>YoY vs same quarter last year: leads +218.74%, spend +47.51%.</a:t>
             </a:r>
           </a:p>
         </p:txBody>
@@ -13346,105 +13348,105 @@
                       <a:pPr algn="ctr"/>
                       <a:r>
                         <a:rPr b="0" sz="1000"/>
-                        <a:t>207,891</a:t>
-                      </a:r>
-                    </a:p>
-                  </a:txBody>
-                  <a:tcPr/>
-                </a:tc>
-                <a:tc>
-                  <a:txBody>
-                    <a:bodyPr/>
-                    <a:lstStyle/>
-                    <a:p>
-                      <a:pPr algn="ctr"/>
-                      <a:r>
-                        <a:rPr b="0" sz="1000"/>
-                        <a:t>5,364</a:t>
-                      </a:r>
-                    </a:p>
-                  </a:txBody>
-                  <a:tcPr/>
-                </a:tc>
-                <a:tc>
-                  <a:txBody>
-                    <a:bodyPr/>
-                    <a:lstStyle/>
-                    <a:p>
-                      <a:pPr algn="ctr"/>
-                      <a:r>
-                        <a:rPr b="0" sz="1000"/>
-                        <a:t>2.58%</a:t>
-                      </a:r>
-                    </a:p>
-                  </a:txBody>
-                  <a:tcPr/>
-                </a:tc>
-                <a:tc>
-                  <a:txBody>
-                    <a:bodyPr/>
-                    <a:lstStyle/>
-                    <a:p>
-                      <a:pPr algn="ctr"/>
-                      <a:r>
-                        <a:rPr b="0" sz="1000"/>
-                        <a:t>£0.53</a:t>
-                      </a:r>
-                    </a:p>
-                  </a:txBody>
-                  <a:tcPr/>
-                </a:tc>
-                <a:tc>
-                  <a:txBody>
-                    <a:bodyPr/>
-                    <a:lstStyle/>
-                    <a:p>
-                      <a:pPr algn="ctr"/>
-                      <a:r>
-                        <a:rPr b="0" sz="1000"/>
-                        <a:t>£2,823.42</a:t>
-                      </a:r>
-                    </a:p>
-                  </a:txBody>
-                  <a:tcPr/>
-                </a:tc>
-                <a:tc>
-                  <a:txBody>
-                    <a:bodyPr/>
-                    <a:lstStyle/>
-                    <a:p>
-                      <a:pPr algn="ctr"/>
-                      <a:r>
-                        <a:rPr b="0" sz="1000"/>
-                        <a:t>340</a:t>
-                      </a:r>
-                    </a:p>
-                  </a:txBody>
-                  <a:tcPr/>
-                </a:tc>
-                <a:tc>
-                  <a:txBody>
-                    <a:bodyPr/>
-                    <a:lstStyle/>
-                    <a:p>
-                      <a:pPr algn="ctr"/>
-                      <a:r>
-                        <a:rPr b="0" sz="1000"/>
-                        <a:t>£8.30</a:t>
-                      </a:r>
-                    </a:p>
-                  </a:txBody>
-                  <a:tcPr/>
-                </a:tc>
-                <a:tc>
-                  <a:txBody>
-                    <a:bodyPr/>
-                    <a:lstStyle/>
-                    <a:p>
-                      <a:pPr algn="ctr"/>
-                      <a:r>
-                        <a:rPr b="0" sz="1000"/>
-                        <a:t>6.34%</a:t>
+                        <a:t>535,323</a:t>
+                      </a:r>
+                    </a:p>
+                  </a:txBody>
+                  <a:tcPr/>
+                </a:tc>
+                <a:tc>
+                  <a:txBody>
+                    <a:bodyPr/>
+                    <a:lstStyle/>
+                    <a:p>
+                      <a:pPr algn="ctr"/>
+                      <a:r>
+                        <a:rPr b="0" sz="1000"/>
+                        <a:t>16,109</a:t>
+                      </a:r>
+                    </a:p>
+                  </a:txBody>
+                  <a:tcPr/>
+                </a:tc>
+                <a:tc>
+                  <a:txBody>
+                    <a:bodyPr/>
+                    <a:lstStyle/>
+                    <a:p>
+                      <a:pPr algn="ctr"/>
+                      <a:r>
+                        <a:rPr b="0" sz="1000"/>
+                        <a:t>3.01%</a:t>
+                      </a:r>
+                    </a:p>
+                  </a:txBody>
+                  <a:tcPr/>
+                </a:tc>
+                <a:tc>
+                  <a:txBody>
+                    <a:bodyPr/>
+                    <a:lstStyle/>
+                    <a:p>
+                      <a:pPr algn="ctr"/>
+                      <a:r>
+                        <a:rPr b="0" sz="1000"/>
+                        <a:t>£0.57</a:t>
+                      </a:r>
+                    </a:p>
+                  </a:txBody>
+                  <a:tcPr/>
+                </a:tc>
+                <a:tc>
+                  <a:txBody>
+                    <a:bodyPr/>
+                    <a:lstStyle/>
+                    <a:p>
+                      <a:pPr algn="ctr"/>
+                      <a:r>
+                        <a:rPr b="0" sz="1000"/>
+                        <a:t>£9,115.70</a:t>
+                      </a:r>
+                    </a:p>
+                  </a:txBody>
+                  <a:tcPr/>
+                </a:tc>
+                <a:tc>
+                  <a:txBody>
+                    <a:bodyPr/>
+                    <a:lstStyle/>
+                    <a:p>
+                      <a:pPr algn="ctr"/>
+                      <a:r>
+                        <a:rPr b="0" sz="1000"/>
+                        <a:t>997</a:t>
+                      </a:r>
+                    </a:p>
+                  </a:txBody>
+                  <a:tcPr/>
+                </a:tc>
+                <a:tc>
+                  <a:txBody>
+                    <a:bodyPr/>
+                    <a:lstStyle/>
+                    <a:p>
+                      <a:pPr algn="ctr"/>
+                      <a:r>
+                        <a:rPr b="0" sz="1000"/>
+                        <a:t>£9.14</a:t>
+                      </a:r>
+                    </a:p>
+                  </a:txBody>
+                  <a:tcPr/>
+                </a:tc>
+                <a:tc>
+                  <a:txBody>
+                    <a:bodyPr/>
+                    <a:lstStyle/>
+                    <a:p>
+                      <a:pPr algn="ctr"/>
+                      <a:r>
+                        <a:rPr b="0" sz="1000"/>
+                        <a:t>6.19%</a:t>
                       </a:r>
                     </a:p>
                   </a:txBody>
@@ -13478,7 +13480,7 @@
                       <a:pPr algn="ctr"/>
                       <a:r>
                         <a:rPr b="1" sz="1000"/>
-                        <a:t>1,004,258</a:t>
+                        <a:t>1,331,690</a:t>
                       </a:r>
                     </a:p>
                   </a:txBody>
@@ -13496,7 +13498,7 @@
                       <a:pPr algn="ctr"/>
                       <a:r>
                         <a:rPr b="1" sz="1000"/>
-                        <a:t>45,293</a:t>
+                        <a:t>56,038</a:t>
                       </a:r>
                     </a:p>
                   </a:txBody>
@@ -13514,7 +13516,7 @@
                       <a:pPr algn="ctr"/>
                       <a:r>
                         <a:rPr b="1" sz="1000"/>
-                        <a:t>4.51%</a:t>
+                        <a:t>4.21%</a:t>
                       </a:r>
                     </a:p>
                   </a:txBody>
@@ -13532,7 +13534,7 @@
                       <a:pPr algn="ctr"/>
                       <a:r>
                         <a:rPr b="1" sz="1000"/>
-                        <a:t>£0.67</a:t>
+                        <a:t>£0.65</a:t>
                       </a:r>
                     </a:p>
                   </a:txBody>
@@ -13550,7 +13552,7 @@
                       <a:pPr algn="ctr"/>
                       <a:r>
                         <a:rPr b="1" sz="1000"/>
-                        <a:t>£30,289.42</a:t>
+                        <a:t>£36,581.70</a:t>
                       </a:r>
                     </a:p>
                   </a:txBody>
@@ -13568,7 +13570,7 @@
                       <a:pPr algn="ctr"/>
                       <a:r>
                         <a:rPr b="1" sz="1000"/>
-                        <a:t>3,034</a:t>
+                        <a:t>3,691</a:t>
                       </a:r>
                     </a:p>
                   </a:txBody>
@@ -13586,7 +13588,7 @@
                       <a:pPr algn="ctr"/>
                       <a:r>
                         <a:rPr b="1" sz="1000"/>
-                        <a:t>£9.98</a:t>
+                        <a:t>£9.91</a:t>
                       </a:r>
                     </a:p>
                   </a:txBody>
@@ -13604,7 +13606,7 @@
                       <a:pPr algn="ctr"/>
                       <a:r>
                         <a:rPr b="1" sz="1000"/>
-                        <a:t>6.70%</a:t>
+                        <a:t>6.59%</a:t>
                       </a:r>
                     </a:p>
                   </a:txBody>
@@ -13793,7 +13795,7 @@
               </a:defRPr>
             </a:pPr>
             <a:r>
-              <a:t>Other generated 3,034 leads from £30,289.42 with a quarter CPL of £9.98.</a:t>
+              <a:t>Other generated 3,691 leads from £36,581.70 with a quarter CPL of £9.91.</a:t>
             </a:r>
           </a:p>
           <a:p>
@@ -13817,7 +13819,7 @@
               </a:defRPr>
             </a:pPr>
             <a:r>
-              <a:t>YoY vs same quarter last year: leads +162.00%, spend +22.14%.</a:t>
+              <a:t>YoY vs same quarter last year: leads +218.74%, spend +47.51%.</a:t>
             </a:r>
           </a:p>
         </p:txBody>
@@ -14044,7 +14046,7 @@
               </a:defRPr>
             </a:pPr>
             <a:r>
-              <a:t>Best efficiency was in Mar (£34.66 CPL), while Jan was highest at £41.65.</a:t>
+              <a:t>Best efficiency was in Mar (£34.87 CPL), while Jan was highest at £41.65.</a:t>
             </a:r>
           </a:p>
           <a:p>
@@ -14056,7 +14058,7 @@
               </a:defRPr>
             </a:pPr>
             <a:r>
-              <a:t>Quarter total: 4,722 leads from £190,773.79 spend at a blended CPL of £40.40.</a:t>
+              <a:t>Quarter total: 5,632 leads from £222,611.31 spend at a blended CPL of £39.53.</a:t>
             </a:r>
           </a:p>
           <a:p>
@@ -14068,7 +14070,7 @@
               </a:defRPr>
             </a:pPr>
             <a:r>
-              <a:t>YoY vs same quarter last year: leads +34.00% and spend +27.16%.</a:t>
+              <a:t>YoY vs same quarter last year: leads +59.82% and spend +48.39%.</a:t>
             </a:r>
           </a:p>
           <a:p>
@@ -14080,7 +14082,7 @@
               </a:defRPr>
             </a:pPr>
             <a:r>
-              <a:t>Brand generated the highest share of leads (58.5%).</a:t>
+              <a:t>Brand generated the highest share of leads (59.9%).</a:t>
             </a:r>
           </a:p>
         </p:txBody>
@@ -14307,7 +14309,7 @@
               </a:defRPr>
             </a:pPr>
             <a:r>
-              <a:t>Generic represented the largest share of spend (59.6%).</a:t>
+              <a:t>Generic represented the largest share of spend (57.4%).</a:t>
             </a:r>
           </a:p>
           <a:p>
@@ -14319,7 +14321,7 @@
               </a:defRPr>
             </a:pPr>
             <a:r>
-              <a:t>Brand delivered the largest share of leads (91.1%).</a:t>
+              <a:t>Brand delivered the largest share of leads (91.3%).</a:t>
             </a:r>
           </a:p>
           <a:p>
@@ -14530,6 +14532,214 @@
                   <a:srgbClr val="142A4D"/>
                 </a:solidFill>
               </a:rPr>
+              <a:t>Wendy Wu Tours Terms Are Growing</a:t>
+            </a:r>
+          </a:p>
+        </p:txBody>
+      </p:sp>
+      <p:sp>
+        <p:nvSpPr>
+          <p:cNvPr id="3" name="TextBox 2"/>
+          <p:cNvSpPr txBox="1"/>
+          <p:nvPr/>
+        </p:nvSpPr>
+        <p:spPr>
+          <a:xfrm>
+            <a:off x="548640" y="859536"/>
+            <a:ext cx="11247120" cy="411480"/>
+          </a:xfrm>
+          <a:prstGeom prst="rect">
+            <a:avLst/>
+          </a:prstGeom>
+          <a:noFill/>
+        </p:spPr>
+        <p:txBody>
+          <a:bodyPr wrap="none">
+            <a:spAutoFit/>
+          </a:bodyPr>
+          <a:lstStyle/>
+          <a:p>
+            <a:r>
+              <a:rPr sz="1500">
+                <a:solidFill>
+                  <a:srgbClr val="5A5A5A"/>
+                </a:solidFill>
+              </a:rPr>
+              <a:t>Q1 2026 (Jan - Mar 2026)</a:t>
+            </a:r>
+          </a:p>
+        </p:txBody>
+      </p:sp>
+      <p:pic>
+        <p:nvPicPr>
+          <p:cNvPr id="4" name="Picture 3" descr="brand_trend.png"/>
+          <p:cNvPicPr>
+            <a:picLocks noChangeAspect="1"/>
+          </p:cNvPicPr>
+          <p:nvPr/>
+        </p:nvPicPr>
+        <p:blipFill>
+          <a:blip r:embed="rId2"/>
+          <a:stretch>
+            <a:fillRect/>
+          </a:stretch>
+        </p:blipFill>
+        <p:spPr>
+          <a:xfrm>
+            <a:off x="502920" y="1234440"/>
+            <a:ext cx="6720840" cy="4206240"/>
+          </a:xfrm>
+          <a:prstGeom prst="rect">
+            <a:avLst/>
+          </a:prstGeom>
+        </p:spPr>
+      </p:pic>
+      <p:sp>
+        <p:nvSpPr>
+          <p:cNvPr id="5" name="TextBox 4"/>
+          <p:cNvSpPr txBox="1"/>
+          <p:nvPr/>
+        </p:nvSpPr>
+        <p:spPr>
+          <a:xfrm>
+            <a:off x="7452360" y="1417320"/>
+            <a:ext cx="3931920" cy="3474720"/>
+          </a:xfrm>
+          <a:prstGeom prst="rect">
+            <a:avLst/>
+          </a:prstGeom>
+          <a:noFill/>
+        </p:spPr>
+        <p:txBody>
+          <a:bodyPr wrap="none">
+            <a:spAutoFit/>
+          </a:bodyPr>
+          <a:lstStyle/>
+          <a:p>
+            <a:pPr>
+              <a:defRPr sz="1400">
+                <a:solidFill>
+                  <a:srgbClr val="2D2D2D"/>
+                </a:solidFill>
+              </a:defRPr>
+            </a:pPr>
+            <a:r>
+              <a:t>Brand trend data is available for the current period, but a prior-year baseline is not available.</a:t>
+            </a:r>
+          </a:p>
+          <a:p>
+            <a:pPr>
+              <a:defRPr sz="1400">
+                <a:solidFill>
+                  <a:srgbClr val="2D2D2D"/>
+                </a:solidFill>
+              </a:defRPr>
+            </a:pPr>
+            <a:r>
+              <a:t>Peak interest in the quarter fell in Mar.</a:t>
+            </a:r>
+          </a:p>
+          <a:p>
+            <a:pPr>
+              <a:defRPr sz="1400">
+                <a:solidFill>
+                  <a:srgbClr val="2D2D2D"/>
+                </a:solidFill>
+              </a:defRPr>
+            </a:pPr>
+            <a:r>
+              <a:t>The broader trend pattern looks seasonal / spiky.</a:t>
+            </a:r>
+          </a:p>
+        </p:txBody>
+      </p:sp>
+      <p:sp>
+        <p:nvSpPr>
+          <p:cNvPr id="6" name="TextBox 5"/>
+          <p:cNvSpPr txBox="1"/>
+          <p:nvPr/>
+        </p:nvSpPr>
+        <p:spPr>
+          <a:xfrm>
+            <a:off x="548640" y="6217920"/>
+            <a:ext cx="5486400" cy="274320"/>
+          </a:xfrm>
+          <a:prstGeom prst="rect">
+            <a:avLst/>
+          </a:prstGeom>
+          <a:noFill/>
+        </p:spPr>
+        <p:txBody>
+          <a:bodyPr wrap="none">
+            <a:spAutoFit/>
+          </a:bodyPr>
+          <a:lstStyle/>
+          <a:p>
+            <a:r>
+              <a:rPr sz="900">
+                <a:solidFill>
+                  <a:srgbClr val="5A5A5A"/>
+                </a:solidFill>
+              </a:rPr>
+              <a:t>Source: Google Trends</a:t>
+            </a:r>
+          </a:p>
+        </p:txBody>
+      </p:sp>
+    </p:spTree>
+  </p:cSld>
+  <p:clrMapOvr>
+    <a:masterClrMapping/>
+  </p:clrMapOvr>
+</p:sld>
+</file>
+
+<file path=ppt/slides/slide33.xml><?xml version="1.0" encoding="utf-8"?>
+<p:sld xmlns:a="http://schemas.openxmlformats.org/drawingml/2006/main" xmlns:p="http://schemas.openxmlformats.org/presentationml/2006/main" xmlns:r="http://schemas.openxmlformats.org/officeDocument/2006/relationships">
+  <p:cSld>
+    <p:bg>
+      <p:bgPr>
+        <a:solidFill>
+          <a:srgbClr val="F7F9FC"/>
+        </a:solidFill>
+        <a:effectLst/>
+      </p:bgPr>
+    </p:bg>
+    <p:spTree>
+      <p:nvGrpSpPr>
+        <p:cNvPr id="1" name=""/>
+        <p:cNvGrpSpPr/>
+        <p:nvPr/>
+      </p:nvGrpSpPr>
+      <p:grpSpPr/>
+      <p:sp>
+        <p:nvSpPr>
+          <p:cNvPr id="2" name="TextBox 1"/>
+          <p:cNvSpPr txBox="1"/>
+          <p:nvPr/>
+        </p:nvSpPr>
+        <p:spPr>
+          <a:xfrm>
+            <a:off x="548640" y="256032"/>
+            <a:ext cx="11247120" cy="731520"/>
+          </a:xfrm>
+          <a:prstGeom prst="rect">
+            <a:avLst/>
+          </a:prstGeom>
+          <a:noFill/>
+        </p:spPr>
+        <p:txBody>
+          <a:bodyPr wrap="none">
+            <a:spAutoFit/>
+          </a:bodyPr>
+          <a:lstStyle/>
+          <a:p>
+            <a:r>
+              <a:rPr sz="3000" b="1">
+                <a:solidFill>
+                  <a:srgbClr val="142A4D"/>
+                </a:solidFill>
+              </a:rPr>
               <a:t>Japan Demand Trend</a:t>
             </a:r>
           </a:p>
@@ -14680,98 +14890,6 @@
                 </a:solidFill>
               </a:rPr>
               <a:t>Source: Google Trends</a:t>
-            </a:r>
-          </a:p>
-        </p:txBody>
-      </p:sp>
-    </p:spTree>
-  </p:cSld>
-  <p:clrMapOvr>
-    <a:masterClrMapping/>
-  </p:clrMapOvr>
-</p:sld>
-</file>
-
-<file path=ppt/slides/slide33.xml><?xml version="1.0" encoding="utf-8"?>
-<p:sld xmlns:a="http://schemas.openxmlformats.org/drawingml/2006/main" xmlns:p="http://schemas.openxmlformats.org/presentationml/2006/main" xmlns:r="http://schemas.openxmlformats.org/officeDocument/2006/relationships">
-  <p:cSld>
-    <p:bg>
-      <p:bgPr>
-        <a:solidFill>
-          <a:srgbClr val="F7F9FC"/>
-        </a:solidFill>
-        <a:effectLst/>
-      </p:bgPr>
-    </p:bg>
-    <p:spTree>
-      <p:nvGrpSpPr>
-        <p:cNvPr id="1" name=""/>
-        <p:cNvGrpSpPr/>
-        <p:nvPr/>
-      </p:nvGrpSpPr>
-      <p:grpSpPr/>
-      <p:sp>
-        <p:nvSpPr>
-          <p:cNvPr id="2" name="TextBox 1"/>
-          <p:cNvSpPr txBox="1"/>
-          <p:nvPr/>
-        </p:nvSpPr>
-        <p:spPr>
-          <a:xfrm>
-            <a:off x="182880" y="91440"/>
-            <a:ext cx="2011680" cy="274320"/>
-          </a:xfrm>
-          <a:prstGeom prst="rect">
-            <a:avLst/>
-          </a:prstGeom>
-          <a:noFill/>
-        </p:spPr>
-        <p:txBody>
-          <a:bodyPr wrap="none">
-            <a:spAutoFit/>
-          </a:bodyPr>
-          <a:lstStyle/>
-          <a:p>
-            <a:r>
-              <a:rPr sz="100">
-                <a:solidFill>
-                  <a:srgbClr val="F7F9FC"/>
-                </a:solidFill>
-              </a:rPr>
-              <a:t/>
-            </a:r>
-          </a:p>
-        </p:txBody>
-      </p:sp>
-      <p:sp>
-        <p:nvSpPr>
-          <p:cNvPr id="3" name="TextBox 2"/>
-          <p:cNvSpPr txBox="1"/>
-          <p:nvPr/>
-        </p:nvSpPr>
-        <p:spPr>
-          <a:xfrm>
-            <a:off x="731520" y="2560320"/>
-            <a:ext cx="10058400" cy="822960"/>
-          </a:xfrm>
-          <a:prstGeom prst="rect">
-            <a:avLst/>
-          </a:prstGeom>
-          <a:noFill/>
-        </p:spPr>
-        <p:txBody>
-          <a:bodyPr wrap="none">
-            <a:spAutoFit/>
-          </a:bodyPr>
-          <a:lstStyle/>
-          <a:p>
-            <a:r>
-              <a:rPr sz="4400">
-                <a:solidFill>
-                  <a:srgbClr val="142A4D"/>
-                </a:solidFill>
-              </a:rPr>
-              <a:t>Auction Insights</a:t>
             </a:r>
           </a:p>
         </p:txBody>
@@ -14830,7 +14948,7 @@
                   <a:srgbClr val="142A4D"/>
                 </a:solidFill>
               </a:rPr>
-              <a:t>Brand coverage is very strong</a:t>
+              <a:t>China Demand Trend</a:t>
             </a:r>
           </a:p>
         </p:txBody>
@@ -14868,965 +14986,30 @@
           </a:p>
         </p:txBody>
       </p:sp>
-      <p:graphicFrame>
-        <p:nvGraphicFramePr>
-          <p:cNvPr id="4" name="Table 3"/>
-          <p:cNvGraphicFramePr>
-            <a:graphicFrameLocks noGrp="1"/>
-          </p:cNvGraphicFramePr>
+      <p:pic>
+        <p:nvPicPr>
+          <p:cNvPr id="4" name="Picture 3" descr="trend_china_trend.png"/>
+          <p:cNvPicPr>
+            <a:picLocks noChangeAspect="1"/>
+          </p:cNvPicPr>
           <p:nvPr/>
-        </p:nvGraphicFramePr>
-        <p:xfrm>
-          <a:off x="411480" y="1234440"/>
-          <a:ext cx="11292840" cy="3063240"/>
-        </p:xfrm>
-        <a:graphic>
-          <a:graphicData uri="http://schemas.openxmlformats.org/drawingml/2006/table">
-            <a:tbl>
-              <a:tblPr firstRow="1" bandRow="1">
-                <a:tableStyleId>{5C22544A-7EE6-4342-B048-85BDC9FD1C3A}</a:tableStyleId>
-              </a:tblPr>
-              <a:tblGrid>
-                <a:gridCol w="1613262"/>
-                <a:gridCol w="1613262"/>
-                <a:gridCol w="1613262"/>
-                <a:gridCol w="1613262"/>
-                <a:gridCol w="1613262"/>
-                <a:gridCol w="1613262"/>
-                <a:gridCol w="1613268"/>
-              </a:tblGrid>
-              <a:tr h="340360">
-                <a:tc>
-                  <a:txBody>
-                    <a:bodyPr/>
-                    <a:lstStyle/>
-                    <a:p>
-                      <a:pPr algn="ctr"/>
-                      <a:r>
-                        <a:rPr b="1" sz="1000"/>
-                        <a:t>Domain</a:t>
-                      </a:r>
-                    </a:p>
-                  </a:txBody>
-                  <a:tcPr>
-                    <a:solidFill>
-                      <a:srgbClr val="DBE6F4"/>
-                    </a:solidFill>
-                  </a:tcPr>
-                </a:tc>
-                <a:tc>
-                  <a:txBody>
-                    <a:bodyPr/>
-                    <a:lstStyle/>
-                    <a:p>
-                      <a:pPr algn="ctr"/>
-                      <a:r>
-                        <a:rPr b="1" sz="1000"/>
-                        <a:t>Impression Share</a:t>
-                      </a:r>
-                    </a:p>
-                  </a:txBody>
-                  <a:tcPr>
-                    <a:solidFill>
-                      <a:srgbClr val="DBE6F4"/>
-                    </a:solidFill>
-                  </a:tcPr>
-                </a:tc>
-                <a:tc>
-                  <a:txBody>
-                    <a:bodyPr/>
-                    <a:lstStyle/>
-                    <a:p>
-                      <a:pPr algn="ctr"/>
-                      <a:r>
-                        <a:rPr b="1" sz="1000"/>
-                        <a:t>Overlap Rate</a:t>
-                      </a:r>
-                    </a:p>
-                  </a:txBody>
-                  <a:tcPr>
-                    <a:solidFill>
-                      <a:srgbClr val="DBE6F4"/>
-                    </a:solidFill>
-                  </a:tcPr>
-                </a:tc>
-                <a:tc>
-                  <a:txBody>
-                    <a:bodyPr/>
-                    <a:lstStyle/>
-                    <a:p>
-                      <a:pPr algn="ctr"/>
-                      <a:r>
-                        <a:rPr b="1" sz="1000"/>
-                        <a:t>Position Above Rate</a:t>
-                      </a:r>
-                    </a:p>
-                  </a:txBody>
-                  <a:tcPr>
-                    <a:solidFill>
-                      <a:srgbClr val="DBE6F4"/>
-                    </a:solidFill>
-                  </a:tcPr>
-                </a:tc>
-                <a:tc>
-                  <a:txBody>
-                    <a:bodyPr/>
-                    <a:lstStyle/>
-                    <a:p>
-                      <a:pPr algn="ctr"/>
-                      <a:r>
-                        <a:rPr b="1" sz="1000"/>
-                        <a:t>Top of Page Rate</a:t>
-                      </a:r>
-                    </a:p>
-                  </a:txBody>
-                  <a:tcPr>
-                    <a:solidFill>
-                      <a:srgbClr val="DBE6F4"/>
-                    </a:solidFill>
-                  </a:tcPr>
-                </a:tc>
-                <a:tc>
-                  <a:txBody>
-                    <a:bodyPr/>
-                    <a:lstStyle/>
-                    <a:p>
-                      <a:pPr algn="ctr"/>
-                      <a:r>
-                        <a:rPr b="1" sz="1000"/>
-                        <a:t>Absolute Top Rate</a:t>
-                      </a:r>
-                    </a:p>
-                  </a:txBody>
-                  <a:tcPr>
-                    <a:solidFill>
-                      <a:srgbClr val="DBE6F4"/>
-                    </a:solidFill>
-                  </a:tcPr>
-                </a:tc>
-                <a:tc>
-                  <a:txBody>
-                    <a:bodyPr/>
-                    <a:lstStyle/>
-                    <a:p>
-                      <a:pPr algn="ctr"/>
-                      <a:r>
-                        <a:rPr b="1" sz="1000"/>
-                        <a:t>Outranking Share</a:t>
-                      </a:r>
-                    </a:p>
-                  </a:txBody>
-                  <a:tcPr>
-                    <a:solidFill>
-                      <a:srgbClr val="DBE6F4"/>
-                    </a:solidFill>
-                  </a:tcPr>
-                </a:tc>
-              </a:tr>
-              <a:tr h="340360">
-                <a:tc>
-                  <a:txBody>
-                    <a:bodyPr/>
-                    <a:lstStyle/>
-                    <a:p>
-                      <a:pPr algn="ctr"/>
-                      <a:r>
-                        <a:rPr b="0" sz="1000"/>
-                        <a:t>getyourguide.com</a:t>
-                      </a:r>
-                    </a:p>
-                  </a:txBody>
-                  <a:tcPr/>
-                </a:tc>
-                <a:tc>
-                  <a:txBody>
-                    <a:bodyPr/>
-                    <a:lstStyle/>
-                    <a:p>
-                      <a:pPr algn="ctr"/>
-                      <a:r>
-                        <a:rPr b="0" sz="1000"/>
-                        <a:t>n/a</a:t>
-                      </a:r>
-                    </a:p>
-                  </a:txBody>
-                  <a:tcPr/>
-                </a:tc>
-                <a:tc>
-                  <a:txBody>
-                    <a:bodyPr/>
-                    <a:lstStyle/>
-                    <a:p>
-                      <a:pPr algn="ctr"/>
-                      <a:r>
-                        <a:rPr b="0" sz="1000"/>
-                        <a:t>4.0%</a:t>
-                      </a:r>
-                    </a:p>
-                  </a:txBody>
-                  <a:tcPr/>
-                </a:tc>
-                <a:tc>
-                  <a:txBody>
-                    <a:bodyPr/>
-                    <a:lstStyle/>
-                    <a:p>
-                      <a:pPr algn="ctr"/>
-                      <a:r>
-                        <a:rPr b="0" sz="1000"/>
-                        <a:t>53.3%</a:t>
-                      </a:r>
-                    </a:p>
-                  </a:txBody>
-                  <a:tcPr/>
-                </a:tc>
-                <a:tc>
-                  <a:txBody>
-                    <a:bodyPr/>
-                    <a:lstStyle/>
-                    <a:p>
-                      <a:pPr algn="ctr"/>
-                      <a:r>
-                        <a:rPr b="0" sz="1000"/>
-                        <a:t>85.3%</a:t>
-                      </a:r>
-                    </a:p>
-                  </a:txBody>
-                  <a:tcPr/>
-                </a:tc>
-                <a:tc>
-                  <a:txBody>
-                    <a:bodyPr/>
-                    <a:lstStyle/>
-                    <a:p>
-                      <a:pPr algn="ctr"/>
-                      <a:r>
-                        <a:rPr b="0" sz="1000"/>
-                        <a:t>34.7%</a:t>
-                      </a:r>
-                    </a:p>
-                  </a:txBody>
-                  <a:tcPr/>
-                </a:tc>
-                <a:tc>
-                  <a:txBody>
-                    <a:bodyPr/>
-                    <a:lstStyle/>
-                    <a:p>
-                      <a:pPr algn="ctr"/>
-                      <a:r>
-                        <a:rPr b="0" sz="1000"/>
-                        <a:t>11.0%</a:t>
-                      </a:r>
-                    </a:p>
-                  </a:txBody>
-                  <a:tcPr/>
-                </a:tc>
-              </a:tr>
-              <a:tr h="340360">
-                <a:tc>
-                  <a:txBody>
-                    <a:bodyPr/>
-                    <a:lstStyle/>
-                    <a:p>
-                      <a:pPr algn="ctr"/>
-                      <a:r>
-                        <a:rPr b="0" sz="1000"/>
-                        <a:t>tui.co.uk</a:t>
-                      </a:r>
-                    </a:p>
-                  </a:txBody>
-                  <a:tcPr/>
-                </a:tc>
-                <a:tc>
-                  <a:txBody>
-                    <a:bodyPr/>
-                    <a:lstStyle/>
-                    <a:p>
-                      <a:pPr algn="ctr"/>
-                      <a:r>
-                        <a:rPr b="0" sz="1000"/>
-                        <a:t>n/a</a:t>
-                      </a:r>
-                    </a:p>
-                  </a:txBody>
-                  <a:tcPr/>
-                </a:tc>
-                <a:tc>
-                  <a:txBody>
-                    <a:bodyPr/>
-                    <a:lstStyle/>
-                    <a:p>
-                      <a:pPr algn="ctr"/>
-                      <a:r>
-                        <a:rPr b="0" sz="1000"/>
-                        <a:t>1.9%</a:t>
-                      </a:r>
-                    </a:p>
-                  </a:txBody>
-                  <a:tcPr/>
-                </a:tc>
-                <a:tc>
-                  <a:txBody>
-                    <a:bodyPr/>
-                    <a:lstStyle/>
-                    <a:p>
-                      <a:pPr algn="ctr"/>
-                      <a:r>
-                        <a:rPr b="0" sz="1000"/>
-                        <a:t>64.1%</a:t>
-                      </a:r>
-                    </a:p>
-                  </a:txBody>
-                  <a:tcPr/>
-                </a:tc>
-                <a:tc>
-                  <a:txBody>
-                    <a:bodyPr/>
-                    <a:lstStyle/>
-                    <a:p>
-                      <a:pPr algn="ctr"/>
-                      <a:r>
-                        <a:rPr b="0" sz="1000"/>
-                        <a:t>84.5%</a:t>
-                      </a:r>
-                    </a:p>
-                  </a:txBody>
-                  <a:tcPr/>
-                </a:tc>
-                <a:tc>
-                  <a:txBody>
-                    <a:bodyPr/>
-                    <a:lstStyle/>
-                    <a:p>
-                      <a:pPr algn="ctr"/>
-                      <a:r>
-                        <a:rPr b="0" sz="1000"/>
-                        <a:t>32.4%</a:t>
-                      </a:r>
-                    </a:p>
-                  </a:txBody>
-                  <a:tcPr/>
-                </a:tc>
-                <a:tc>
-                  <a:txBody>
-                    <a:bodyPr/>
-                    <a:lstStyle/>
-                    <a:p>
-                      <a:pPr algn="ctr"/>
-                      <a:r>
-                        <a:rPr b="0" sz="1000"/>
-                        <a:t>11.1%</a:t>
-                      </a:r>
-                    </a:p>
-                  </a:txBody>
-                  <a:tcPr/>
-                </a:tc>
-              </a:tr>
-              <a:tr h="340360">
-                <a:tc>
-                  <a:txBody>
-                    <a:bodyPr/>
-                    <a:lstStyle/>
-                    <a:p>
-                      <a:pPr algn="ctr"/>
-                      <a:r>
-                        <a:rPr b="0" sz="1000"/>
-                        <a:t>greatrail.com</a:t>
-                      </a:r>
-                    </a:p>
-                  </a:txBody>
-                  <a:tcPr/>
-                </a:tc>
-                <a:tc>
-                  <a:txBody>
-                    <a:bodyPr/>
-                    <a:lstStyle/>
-                    <a:p>
-                      <a:pPr algn="ctr"/>
-                      <a:r>
-                        <a:rPr b="0" sz="1000"/>
-                        <a:t>n/a</a:t>
-                      </a:r>
-                    </a:p>
-                  </a:txBody>
-                  <a:tcPr/>
-                </a:tc>
-                <a:tc>
-                  <a:txBody>
-                    <a:bodyPr/>
-                    <a:lstStyle/>
-                    <a:p>
-                      <a:pPr algn="ctr"/>
-                      <a:r>
-                        <a:rPr b="0" sz="1000"/>
-                        <a:t>12.1%</a:t>
-                      </a:r>
-                    </a:p>
-                  </a:txBody>
-                  <a:tcPr/>
-                </a:tc>
-                <a:tc>
-                  <a:txBody>
-                    <a:bodyPr/>
-                    <a:lstStyle/>
-                    <a:p>
-                      <a:pPr algn="ctr"/>
-                      <a:r>
-                        <a:rPr b="0" sz="1000"/>
-                        <a:t>48.2%</a:t>
-                      </a:r>
-                    </a:p>
-                  </a:txBody>
-                  <a:tcPr/>
-                </a:tc>
-                <a:tc>
-                  <a:txBody>
-                    <a:bodyPr/>
-                    <a:lstStyle/>
-                    <a:p>
-                      <a:pPr algn="ctr"/>
-                      <a:r>
-                        <a:rPr b="0" sz="1000"/>
-                        <a:t>81.6%</a:t>
-                      </a:r>
-                    </a:p>
-                  </a:txBody>
-                  <a:tcPr/>
-                </a:tc>
-                <a:tc>
-                  <a:txBody>
-                    <a:bodyPr/>
-                    <a:lstStyle/>
-                    <a:p>
-                      <a:pPr algn="ctr"/>
-                      <a:r>
-                        <a:rPr b="0" sz="1000"/>
-                        <a:t>28.2%</a:t>
-                      </a:r>
-                    </a:p>
-                  </a:txBody>
-                  <a:tcPr/>
-                </a:tc>
-                <a:tc>
-                  <a:txBody>
-                    <a:bodyPr/>
-                    <a:lstStyle/>
-                    <a:p>
-                      <a:pPr algn="ctr"/>
-                      <a:r>
-                        <a:rPr b="0" sz="1000"/>
-                        <a:t>10.6%</a:t>
-                      </a:r>
-                    </a:p>
-                  </a:txBody>
-                  <a:tcPr/>
-                </a:tc>
-              </a:tr>
-              <a:tr h="340360">
-                <a:tc>
-                  <a:txBody>
-                    <a:bodyPr/>
-                    <a:lstStyle/>
-                    <a:p>
-                      <a:pPr algn="ctr"/>
-                      <a:r>
-                        <a:rPr b="0" sz="1000"/>
-                        <a:t>exoticca.com</a:t>
-                      </a:r>
-                    </a:p>
-                  </a:txBody>
-                  <a:tcPr/>
-                </a:tc>
-                <a:tc>
-                  <a:txBody>
-                    <a:bodyPr/>
-                    <a:lstStyle/>
-                    <a:p>
-                      <a:pPr algn="ctr"/>
-                      <a:r>
-                        <a:rPr b="0" sz="1000"/>
-                        <a:t>n/a</a:t>
-                      </a:r>
-                    </a:p>
-                  </a:txBody>
-                  <a:tcPr/>
-                </a:tc>
-                <a:tc>
-                  <a:txBody>
-                    <a:bodyPr/>
-                    <a:lstStyle/>
-                    <a:p>
-                      <a:pPr algn="ctr"/>
-                      <a:r>
-                        <a:rPr b="0" sz="1000"/>
-                        <a:t>19.9%</a:t>
-                      </a:r>
-                    </a:p>
-                  </a:txBody>
-                  <a:tcPr/>
-                </a:tc>
-                <a:tc>
-                  <a:txBody>
-                    <a:bodyPr/>
-                    <a:lstStyle/>
-                    <a:p>
-                      <a:pPr algn="ctr"/>
-                      <a:r>
-                        <a:rPr b="0" sz="1000"/>
-                        <a:t>47.4%</a:t>
-                      </a:r>
-                    </a:p>
-                  </a:txBody>
-                  <a:tcPr/>
-                </a:tc>
-                <a:tc>
-                  <a:txBody>
-                    <a:bodyPr/>
-                    <a:lstStyle/>
-                    <a:p>
-                      <a:pPr algn="ctr"/>
-                      <a:r>
-                        <a:rPr b="0" sz="1000"/>
-                        <a:t>78.3%</a:t>
-                      </a:r>
-                    </a:p>
-                  </a:txBody>
-                  <a:tcPr/>
-                </a:tc>
-                <a:tc>
-                  <a:txBody>
-                    <a:bodyPr/>
-                    <a:lstStyle/>
-                    <a:p>
-                      <a:pPr algn="ctr"/>
-                      <a:r>
-                        <a:rPr b="0" sz="1000"/>
-                        <a:t>21.1%</a:t>
-                      </a:r>
-                    </a:p>
-                  </a:txBody>
-                  <a:tcPr/>
-                </a:tc>
-                <a:tc>
-                  <a:txBody>
-                    <a:bodyPr/>
-                    <a:lstStyle/>
-                    <a:p>
-                      <a:pPr algn="ctr"/>
-                      <a:r>
-                        <a:rPr b="0" sz="1000"/>
-                        <a:t>10.2%</a:t>
-                      </a:r>
-                    </a:p>
-                  </a:txBody>
-                  <a:tcPr/>
-                </a:tc>
-              </a:tr>
-              <a:tr h="340360">
-                <a:tc>
-                  <a:txBody>
-                    <a:bodyPr/>
-                    <a:lstStyle/>
-                    <a:p>
-                      <a:pPr algn="ctr"/>
-                      <a:r>
-                        <a:rPr b="0" sz="1000"/>
-                        <a:t>saga.co.uk</a:t>
-                      </a:r>
-                    </a:p>
-                  </a:txBody>
-                  <a:tcPr/>
-                </a:tc>
-                <a:tc>
-                  <a:txBody>
-                    <a:bodyPr/>
-                    <a:lstStyle/>
-                    <a:p>
-                      <a:pPr algn="ctr"/>
-                      <a:r>
-                        <a:rPr b="0" sz="1000"/>
-                        <a:t>n/a</a:t>
-                      </a:r>
-                    </a:p>
-                  </a:txBody>
-                  <a:tcPr/>
-                </a:tc>
-                <a:tc>
-                  <a:txBody>
-                    <a:bodyPr/>
-                    <a:lstStyle/>
-                    <a:p>
-                      <a:pPr algn="ctr"/>
-                      <a:r>
-                        <a:rPr b="0" sz="1000"/>
-                        <a:t>13.2%</a:t>
-                      </a:r>
-                    </a:p>
-                  </a:txBody>
-                  <a:tcPr/>
-                </a:tc>
-                <a:tc>
-                  <a:txBody>
-                    <a:bodyPr/>
-                    <a:lstStyle/>
-                    <a:p>
-                      <a:pPr algn="ctr"/>
-                      <a:r>
-                        <a:rPr b="0" sz="1000"/>
-                        <a:t>65.1%</a:t>
-                      </a:r>
-                    </a:p>
-                  </a:txBody>
-                  <a:tcPr/>
-                </a:tc>
-                <a:tc>
-                  <a:txBody>
-                    <a:bodyPr/>
-                    <a:lstStyle/>
-                    <a:p>
-                      <a:pPr algn="ctr"/>
-                      <a:r>
-                        <a:rPr b="0" sz="1000"/>
-                        <a:t>69.6%</a:t>
-                      </a:r>
-                    </a:p>
-                  </a:txBody>
-                  <a:tcPr/>
-                </a:tc>
-                <a:tc>
-                  <a:txBody>
-                    <a:bodyPr/>
-                    <a:lstStyle/>
-                    <a:p>
-                      <a:pPr algn="ctr"/>
-                      <a:r>
-                        <a:rPr b="0" sz="1000"/>
-                        <a:t>28.2%</a:t>
-                      </a:r>
-                    </a:p>
-                  </a:txBody>
-                  <a:tcPr/>
-                </a:tc>
-                <a:tc>
-                  <a:txBody>
-                    <a:bodyPr/>
-                    <a:lstStyle/>
-                    <a:p>
-                      <a:pPr algn="ctr"/>
-                      <a:r>
-                        <a:rPr b="0" sz="1000"/>
-                        <a:t>10.3%</a:t>
-                      </a:r>
-                    </a:p>
-                  </a:txBody>
-                  <a:tcPr/>
-                </a:tc>
-              </a:tr>
-              <a:tr h="340360">
-                <a:tc>
-                  <a:txBody>
-                    <a:bodyPr/>
-                    <a:lstStyle/>
-                    <a:p>
-                      <a:pPr algn="ctr"/>
-                      <a:r>
-                        <a:rPr b="0" sz="1000"/>
-                        <a:t>loveholidays.com</a:t>
-                      </a:r>
-                    </a:p>
-                  </a:txBody>
-                  <a:tcPr/>
-                </a:tc>
-                <a:tc>
-                  <a:txBody>
-                    <a:bodyPr/>
-                    <a:lstStyle/>
-                    <a:p>
-                      <a:pPr algn="ctr"/>
-                      <a:r>
-                        <a:rPr b="0" sz="1000"/>
-                        <a:t>n/a</a:t>
-                      </a:r>
-                    </a:p>
-                  </a:txBody>
-                  <a:tcPr/>
-                </a:tc>
-                <a:tc>
-                  <a:txBody>
-                    <a:bodyPr/>
-                    <a:lstStyle/>
-                    <a:p>
-                      <a:pPr algn="ctr"/>
-                      <a:r>
-                        <a:rPr b="0" sz="1000"/>
-                        <a:t>7.6%</a:t>
-                      </a:r>
-                    </a:p>
-                  </a:txBody>
-                  <a:tcPr/>
-                </a:tc>
-                <a:tc>
-                  <a:txBody>
-                    <a:bodyPr/>
-                    <a:lstStyle/>
-                    <a:p>
-                      <a:pPr algn="ctr"/>
-                      <a:r>
-                        <a:rPr b="0" sz="1000"/>
-                        <a:t>57.0%</a:t>
-                      </a:r>
-                    </a:p>
-                  </a:txBody>
-                  <a:tcPr/>
-                </a:tc>
-                <a:tc>
-                  <a:txBody>
-                    <a:bodyPr/>
-                    <a:lstStyle/>
-                    <a:p>
-                      <a:pPr algn="ctr"/>
-                      <a:r>
-                        <a:rPr b="0" sz="1000"/>
-                        <a:t>88.6%</a:t>
-                      </a:r>
-                    </a:p>
-                  </a:txBody>
-                  <a:tcPr/>
-                </a:tc>
-                <a:tc>
-                  <a:txBody>
-                    <a:bodyPr/>
-                    <a:lstStyle/>
-                    <a:p>
-                      <a:pPr algn="ctr"/>
-                      <a:r>
-                        <a:rPr b="0" sz="1000"/>
-                        <a:t>21.8%</a:t>
-                      </a:r>
-                    </a:p>
-                  </a:txBody>
-                  <a:tcPr/>
-                </a:tc>
-                <a:tc>
-                  <a:txBody>
-                    <a:bodyPr/>
-                    <a:lstStyle/>
-                    <a:p>
-                      <a:pPr algn="ctr"/>
-                      <a:r>
-                        <a:rPr b="0" sz="1000"/>
-                        <a:t>10.8%</a:t>
-                      </a:r>
-                    </a:p>
-                  </a:txBody>
-                  <a:tcPr/>
-                </a:tc>
-              </a:tr>
-              <a:tr h="340360">
-                <a:tc>
-                  <a:txBody>
-                    <a:bodyPr/>
-                    <a:lstStyle/>
-                    <a:p>
-                      <a:pPr algn="ctr"/>
-                      <a:r>
-                        <a:rPr b="0" sz="1000"/>
-                        <a:t>audleytravel.com</a:t>
-                      </a:r>
-                    </a:p>
-                  </a:txBody>
-                  <a:tcPr/>
-                </a:tc>
-                <a:tc>
-                  <a:txBody>
-                    <a:bodyPr/>
-                    <a:lstStyle/>
-                    <a:p>
-                      <a:pPr algn="ctr"/>
-                      <a:r>
-                        <a:rPr b="0" sz="1000"/>
-                        <a:t>29.1%</a:t>
-                      </a:r>
-                    </a:p>
-                  </a:txBody>
-                  <a:tcPr/>
-                </a:tc>
-                <a:tc>
-                  <a:txBody>
-                    <a:bodyPr/>
-                    <a:lstStyle/>
-                    <a:p>
-                      <a:pPr algn="ctr"/>
-                      <a:r>
-                        <a:rPr b="0" sz="1000"/>
-                        <a:t>41.0%</a:t>
-                      </a:r>
-                    </a:p>
-                  </a:txBody>
-                  <a:tcPr/>
-                </a:tc>
-                <a:tc>
-                  <a:txBody>
-                    <a:bodyPr/>
-                    <a:lstStyle/>
-                    <a:p>
-                      <a:pPr algn="ctr"/>
-                      <a:r>
-                        <a:rPr b="0" sz="1000"/>
-                        <a:t>70.0%</a:t>
-                      </a:r>
-                    </a:p>
-                  </a:txBody>
-                  <a:tcPr/>
-                </a:tc>
-                <a:tc>
-                  <a:txBody>
-                    <a:bodyPr/>
-                    <a:lstStyle/>
-                    <a:p>
-                      <a:pPr algn="ctr"/>
-                      <a:r>
-                        <a:rPr b="0" sz="1000"/>
-                        <a:t>82.4%</a:t>
-                      </a:r>
-                    </a:p>
-                  </a:txBody>
-                  <a:tcPr/>
-                </a:tc>
-                <a:tc>
-                  <a:txBody>
-                    <a:bodyPr/>
-                    <a:lstStyle/>
-                    <a:p>
-                      <a:pPr algn="ctr"/>
-                      <a:r>
-                        <a:rPr b="0" sz="1000"/>
-                        <a:t>45.1%</a:t>
-                      </a:r>
-                    </a:p>
-                  </a:txBody>
-                  <a:tcPr/>
-                </a:tc>
-                <a:tc>
-                  <a:txBody>
-                    <a:bodyPr/>
-                    <a:lstStyle/>
-                    <a:p>
-                      <a:pPr algn="ctr"/>
-                      <a:r>
-                        <a:rPr b="0" sz="1000"/>
-                        <a:t>8.0%</a:t>
-                      </a:r>
-                    </a:p>
-                  </a:txBody>
-                  <a:tcPr/>
-                </a:tc>
-              </a:tr>
-              <a:tr h="340360">
-                <a:tc>
-                  <a:txBody>
-                    <a:bodyPr/>
-                    <a:lstStyle/>
-                    <a:p>
-                      <a:pPr algn="ctr"/>
-                      <a:r>
-                        <a:rPr b="0" sz="1000"/>
-                        <a:t>distantjourneys.co.uk</a:t>
-                      </a:r>
-                    </a:p>
-                  </a:txBody>
-                  <a:tcPr/>
-                </a:tc>
-                <a:tc>
-                  <a:txBody>
-                    <a:bodyPr/>
-                    <a:lstStyle/>
-                    <a:p>
-                      <a:pPr algn="ctr"/>
-                      <a:r>
-                        <a:rPr b="0" sz="1000"/>
-                        <a:t>14.1%</a:t>
-                      </a:r>
-                    </a:p>
-                  </a:txBody>
-                  <a:tcPr/>
-                </a:tc>
-                <a:tc>
-                  <a:txBody>
-                    <a:bodyPr/>
-                    <a:lstStyle/>
-                    <a:p>
-                      <a:pPr algn="ctr"/>
-                      <a:r>
-                        <a:rPr b="0" sz="1000"/>
-                        <a:t>37.2%</a:t>
-                      </a:r>
-                    </a:p>
-                  </a:txBody>
-                  <a:tcPr/>
-                </a:tc>
-                <a:tc>
-                  <a:txBody>
-                    <a:bodyPr/>
-                    <a:lstStyle/>
-                    <a:p>
-                      <a:pPr algn="ctr"/>
-                      <a:r>
-                        <a:rPr b="0" sz="1000"/>
-                        <a:t>55.7%</a:t>
-                      </a:r>
-                    </a:p>
-                  </a:txBody>
-                  <a:tcPr/>
-                </a:tc>
-                <a:tc>
-                  <a:txBody>
-                    <a:bodyPr/>
-                    <a:lstStyle/>
-                    <a:p>
-                      <a:pPr algn="ctr"/>
-                      <a:r>
-                        <a:rPr b="0" sz="1000"/>
-                        <a:t>76.2%</a:t>
-                      </a:r>
-                    </a:p>
-                  </a:txBody>
-                  <a:tcPr/>
-                </a:tc>
-                <a:tc>
-                  <a:txBody>
-                    <a:bodyPr/>
-                    <a:lstStyle/>
-                    <a:p>
-                      <a:pPr algn="ctr"/>
-                      <a:r>
-                        <a:rPr b="0" sz="1000"/>
-                        <a:t>26.4%</a:t>
-                      </a:r>
-                    </a:p>
-                  </a:txBody>
-                  <a:tcPr/>
-                </a:tc>
-                <a:tc>
-                  <a:txBody>
-                    <a:bodyPr/>
-                    <a:lstStyle/>
-                    <a:p>
-                      <a:pPr algn="ctr"/>
-                      <a:r>
-                        <a:rPr b="0" sz="1000"/>
-                        <a:t>8.9%</a:t>
-                      </a:r>
-                    </a:p>
-                  </a:txBody>
-                  <a:tcPr/>
-                </a:tc>
-              </a:tr>
-            </a:tbl>
-          </a:graphicData>
-        </a:graphic>
-      </p:graphicFrame>
+        </p:nvPicPr>
+        <p:blipFill>
+          <a:blip r:embed="rId2"/>
+          <a:stretch>
+            <a:fillRect/>
+          </a:stretch>
+        </p:blipFill>
+        <p:spPr>
+          <a:xfrm>
+            <a:off x="502920" y="1234440"/>
+            <a:ext cx="6720840" cy="4206240"/>
+          </a:xfrm>
+          <a:prstGeom prst="rect">
+            <a:avLst/>
+          </a:prstGeom>
+        </p:spPr>
+      </p:pic>
       <p:sp>
         <p:nvSpPr>
           <p:cNvPr id="5" name="TextBox 4"/>
@@ -15835,8 +15018,8 @@
         </p:nvSpPr>
         <p:spPr>
           <a:xfrm>
-            <a:off x="731520" y="4526280"/>
-            <a:ext cx="10698480" cy="1417320"/>
+            <a:off x="7452360" y="1417320"/>
+            <a:ext cx="3931920" cy="3474720"/>
           </a:xfrm>
           <a:prstGeom prst="rect">
             <a:avLst/>
@@ -15857,7 +15040,7 @@
               </a:defRPr>
             </a:pPr>
             <a:r>
-              <a:t>audleytravel.com, distantjourneys.co.uk and exoticca.com are the closest competitors based on overlap rate.</a:t>
+              <a:t>China trend data is available for the current period, but a prior-year baseline is not available.</a:t>
             </a:r>
           </a:p>
           <a:p>
@@ -15869,7 +15052,7 @@
               </a:defRPr>
             </a:pPr>
             <a:r>
-              <a:t>audleytravel.com, distantjourneys.co.uk and you are strongest on impression share among competitors in the file.</a:t>
+              <a:t>Peak interest in the quarter fell in Feb.</a:t>
             </a:r>
           </a:p>
           <a:p>
@@ -15881,7 +15064,7 @@
               </a:defRPr>
             </a:pPr>
             <a:r>
-              <a:t>tui.co.uk, getyourguide.com and loveholidays.com show the strongest outranking presence where that metric is available.</a:t>
+              <a:t>The broader trend pattern looks decreasing.</a:t>
             </a:r>
           </a:p>
         </p:txBody>
@@ -15914,7 +15097,7 @@
                   <a:srgbClr val="5A5A5A"/>
                 </a:solidFill>
               </a:rPr>
-              <a:t>Source: Google Ads Auction Insights</a:t>
+              <a:t>Source: Google Trends</a:t>
             </a:r>
           </a:p>
         </p:txBody>
@@ -16006,7 +15189,7 @@
                   <a:srgbClr val="142A4D"/>
                 </a:solidFill>
               </a:rPr>
-              <a:t>Recommendations</a:t>
+              <a:t>Auction Insights</a:t>
             </a:r>
           </a:p>
         </p:txBody>
@@ -16065,6 +15248,1241 @@
                   <a:srgbClr val="142A4D"/>
                 </a:solidFill>
               </a:rPr>
+              <a:t>Brand coverage is very strong</a:t>
+            </a:r>
+          </a:p>
+        </p:txBody>
+      </p:sp>
+      <p:sp>
+        <p:nvSpPr>
+          <p:cNvPr id="3" name="TextBox 2"/>
+          <p:cNvSpPr txBox="1"/>
+          <p:nvPr/>
+        </p:nvSpPr>
+        <p:spPr>
+          <a:xfrm>
+            <a:off x="548640" y="859536"/>
+            <a:ext cx="11247120" cy="411480"/>
+          </a:xfrm>
+          <a:prstGeom prst="rect">
+            <a:avLst/>
+          </a:prstGeom>
+          <a:noFill/>
+        </p:spPr>
+        <p:txBody>
+          <a:bodyPr wrap="none">
+            <a:spAutoFit/>
+          </a:bodyPr>
+          <a:lstStyle/>
+          <a:p>
+            <a:r>
+              <a:rPr sz="1500">
+                <a:solidFill>
+                  <a:srgbClr val="5A5A5A"/>
+                </a:solidFill>
+              </a:rPr>
+              <a:t>Q1 2026 (Jan - Mar 2026)</a:t>
+            </a:r>
+          </a:p>
+        </p:txBody>
+      </p:sp>
+      <p:graphicFrame>
+        <p:nvGraphicFramePr>
+          <p:cNvPr id="4" name="Table 3"/>
+          <p:cNvGraphicFramePr>
+            <a:graphicFrameLocks noGrp="1"/>
+          </p:cNvGraphicFramePr>
+          <p:nvPr/>
+        </p:nvGraphicFramePr>
+        <p:xfrm>
+          <a:off x="411480" y="1234440"/>
+          <a:ext cx="11292840" cy="3063240"/>
+        </p:xfrm>
+        <a:graphic>
+          <a:graphicData uri="http://schemas.openxmlformats.org/drawingml/2006/table">
+            <a:tbl>
+              <a:tblPr firstRow="1" bandRow="1">
+                <a:tableStyleId>{5C22544A-7EE6-4342-B048-85BDC9FD1C3A}</a:tableStyleId>
+              </a:tblPr>
+              <a:tblGrid>
+                <a:gridCol w="1613262"/>
+                <a:gridCol w="1613262"/>
+                <a:gridCol w="1613262"/>
+                <a:gridCol w="1613262"/>
+                <a:gridCol w="1613262"/>
+                <a:gridCol w="1613262"/>
+                <a:gridCol w="1613268"/>
+              </a:tblGrid>
+              <a:tr h="340360">
+                <a:tc>
+                  <a:txBody>
+                    <a:bodyPr/>
+                    <a:lstStyle/>
+                    <a:p>
+                      <a:pPr algn="ctr"/>
+                      <a:r>
+                        <a:rPr b="1" sz="1000"/>
+                        <a:t>Domain</a:t>
+                      </a:r>
+                    </a:p>
+                  </a:txBody>
+                  <a:tcPr>
+                    <a:solidFill>
+                      <a:srgbClr val="DBE6F4"/>
+                    </a:solidFill>
+                  </a:tcPr>
+                </a:tc>
+                <a:tc>
+                  <a:txBody>
+                    <a:bodyPr/>
+                    <a:lstStyle/>
+                    <a:p>
+                      <a:pPr algn="ctr"/>
+                      <a:r>
+                        <a:rPr b="1" sz="1000"/>
+                        <a:t>Impression Share</a:t>
+                      </a:r>
+                    </a:p>
+                  </a:txBody>
+                  <a:tcPr>
+                    <a:solidFill>
+                      <a:srgbClr val="DBE6F4"/>
+                    </a:solidFill>
+                  </a:tcPr>
+                </a:tc>
+                <a:tc>
+                  <a:txBody>
+                    <a:bodyPr/>
+                    <a:lstStyle/>
+                    <a:p>
+                      <a:pPr algn="ctr"/>
+                      <a:r>
+                        <a:rPr b="1" sz="1000"/>
+                        <a:t>Overlap Rate</a:t>
+                      </a:r>
+                    </a:p>
+                  </a:txBody>
+                  <a:tcPr>
+                    <a:solidFill>
+                      <a:srgbClr val="DBE6F4"/>
+                    </a:solidFill>
+                  </a:tcPr>
+                </a:tc>
+                <a:tc>
+                  <a:txBody>
+                    <a:bodyPr/>
+                    <a:lstStyle/>
+                    <a:p>
+                      <a:pPr algn="ctr"/>
+                      <a:r>
+                        <a:rPr b="1" sz="1000"/>
+                        <a:t>Position Above Rate</a:t>
+                      </a:r>
+                    </a:p>
+                  </a:txBody>
+                  <a:tcPr>
+                    <a:solidFill>
+                      <a:srgbClr val="DBE6F4"/>
+                    </a:solidFill>
+                  </a:tcPr>
+                </a:tc>
+                <a:tc>
+                  <a:txBody>
+                    <a:bodyPr/>
+                    <a:lstStyle/>
+                    <a:p>
+                      <a:pPr algn="ctr"/>
+                      <a:r>
+                        <a:rPr b="1" sz="1000"/>
+                        <a:t>Top of Page Rate</a:t>
+                      </a:r>
+                    </a:p>
+                  </a:txBody>
+                  <a:tcPr>
+                    <a:solidFill>
+                      <a:srgbClr val="DBE6F4"/>
+                    </a:solidFill>
+                  </a:tcPr>
+                </a:tc>
+                <a:tc>
+                  <a:txBody>
+                    <a:bodyPr/>
+                    <a:lstStyle/>
+                    <a:p>
+                      <a:pPr algn="ctr"/>
+                      <a:r>
+                        <a:rPr b="1" sz="1000"/>
+                        <a:t>Absolute Top Rate</a:t>
+                      </a:r>
+                    </a:p>
+                  </a:txBody>
+                  <a:tcPr>
+                    <a:solidFill>
+                      <a:srgbClr val="DBE6F4"/>
+                    </a:solidFill>
+                  </a:tcPr>
+                </a:tc>
+                <a:tc>
+                  <a:txBody>
+                    <a:bodyPr/>
+                    <a:lstStyle/>
+                    <a:p>
+                      <a:pPr algn="ctr"/>
+                      <a:r>
+                        <a:rPr b="1" sz="1000"/>
+                        <a:t>Outranking Share</a:t>
+                      </a:r>
+                    </a:p>
+                  </a:txBody>
+                  <a:tcPr>
+                    <a:solidFill>
+                      <a:srgbClr val="DBE6F4"/>
+                    </a:solidFill>
+                  </a:tcPr>
+                </a:tc>
+              </a:tr>
+              <a:tr h="340360">
+                <a:tc>
+                  <a:txBody>
+                    <a:bodyPr/>
+                    <a:lstStyle/>
+                    <a:p>
+                      <a:pPr algn="ctr"/>
+                      <a:r>
+                        <a:rPr b="0" sz="1000"/>
+                        <a:t>tui.co.uk</a:t>
+                      </a:r>
+                    </a:p>
+                  </a:txBody>
+                  <a:tcPr/>
+                </a:tc>
+                <a:tc>
+                  <a:txBody>
+                    <a:bodyPr/>
+                    <a:lstStyle/>
+                    <a:p>
+                      <a:pPr algn="ctr"/>
+                      <a:r>
+                        <a:rPr b="0" sz="1000"/>
+                        <a:t>n/a</a:t>
+                      </a:r>
+                    </a:p>
+                  </a:txBody>
+                  <a:tcPr/>
+                </a:tc>
+                <a:tc>
+                  <a:txBody>
+                    <a:bodyPr/>
+                    <a:lstStyle/>
+                    <a:p>
+                      <a:pPr algn="ctr"/>
+                      <a:r>
+                        <a:rPr b="0" sz="1000"/>
+                        <a:t>3.6%</a:t>
+                      </a:r>
+                    </a:p>
+                  </a:txBody>
+                  <a:tcPr/>
+                </a:tc>
+                <a:tc>
+                  <a:txBody>
+                    <a:bodyPr/>
+                    <a:lstStyle/>
+                    <a:p>
+                      <a:pPr algn="ctr"/>
+                      <a:r>
+                        <a:rPr b="0" sz="1000"/>
+                        <a:t>57.0%</a:t>
+                      </a:r>
+                    </a:p>
+                  </a:txBody>
+                  <a:tcPr/>
+                </a:tc>
+                <a:tc>
+                  <a:txBody>
+                    <a:bodyPr/>
+                    <a:lstStyle/>
+                    <a:p>
+                      <a:pPr algn="ctr"/>
+                      <a:r>
+                        <a:rPr b="0" sz="1000"/>
+                        <a:t>73.8%</a:t>
+                      </a:r>
+                    </a:p>
+                  </a:txBody>
+                  <a:tcPr/>
+                </a:tc>
+                <a:tc>
+                  <a:txBody>
+                    <a:bodyPr/>
+                    <a:lstStyle/>
+                    <a:p>
+                      <a:pPr algn="ctr"/>
+                      <a:r>
+                        <a:rPr b="0" sz="1000"/>
+                        <a:t>21.3%</a:t>
+                      </a:r>
+                    </a:p>
+                  </a:txBody>
+                  <a:tcPr/>
+                </a:tc>
+                <a:tc>
+                  <a:txBody>
+                    <a:bodyPr/>
+                    <a:lstStyle/>
+                    <a:p>
+                      <a:pPr algn="ctr"/>
+                      <a:r>
+                        <a:rPr b="0" sz="1000"/>
+                        <a:t>18.7%</a:t>
+                      </a:r>
+                    </a:p>
+                  </a:txBody>
+                  <a:tcPr/>
+                </a:tc>
+              </a:tr>
+              <a:tr h="340360">
+                <a:tc>
+                  <a:txBody>
+                    <a:bodyPr/>
+                    <a:lstStyle/>
+                    <a:p>
+                      <a:pPr algn="ctr"/>
+                      <a:r>
+                        <a:rPr b="0" sz="1000"/>
+                        <a:t>gadventures.com</a:t>
+                      </a:r>
+                    </a:p>
+                  </a:txBody>
+                  <a:tcPr/>
+                </a:tc>
+                <a:tc>
+                  <a:txBody>
+                    <a:bodyPr/>
+                    <a:lstStyle/>
+                    <a:p>
+                      <a:pPr algn="ctr"/>
+                      <a:r>
+                        <a:rPr b="0" sz="1000"/>
+                        <a:t>n/a</a:t>
+                      </a:r>
+                    </a:p>
+                  </a:txBody>
+                  <a:tcPr/>
+                </a:tc>
+                <a:tc>
+                  <a:txBody>
+                    <a:bodyPr/>
+                    <a:lstStyle/>
+                    <a:p>
+                      <a:pPr algn="ctr"/>
+                      <a:r>
+                        <a:rPr b="0" sz="1000"/>
+                        <a:t>5.1%</a:t>
+                      </a:r>
+                    </a:p>
+                  </a:txBody>
+                  <a:tcPr/>
+                </a:tc>
+                <a:tc>
+                  <a:txBody>
+                    <a:bodyPr/>
+                    <a:lstStyle/>
+                    <a:p>
+                      <a:pPr algn="ctr"/>
+                      <a:r>
+                        <a:rPr b="0" sz="1000"/>
+                        <a:t>42.6%</a:t>
+                      </a:r>
+                    </a:p>
+                  </a:txBody>
+                  <a:tcPr/>
+                </a:tc>
+                <a:tc>
+                  <a:txBody>
+                    <a:bodyPr/>
+                    <a:lstStyle/>
+                    <a:p>
+                      <a:pPr algn="ctr"/>
+                      <a:r>
+                        <a:rPr b="0" sz="1000"/>
+                        <a:t>70.2%</a:t>
+                      </a:r>
+                    </a:p>
+                  </a:txBody>
+                  <a:tcPr/>
+                </a:tc>
+                <a:tc>
+                  <a:txBody>
+                    <a:bodyPr/>
+                    <a:lstStyle/>
+                    <a:p>
+                      <a:pPr algn="ctr"/>
+                      <a:r>
+                        <a:rPr b="0" sz="1000"/>
+                        <a:t>21.6%</a:t>
+                      </a:r>
+                    </a:p>
+                  </a:txBody>
+                  <a:tcPr/>
+                </a:tc>
+                <a:tc>
+                  <a:txBody>
+                    <a:bodyPr/>
+                    <a:lstStyle/>
+                    <a:p>
+                      <a:pPr algn="ctr"/>
+                      <a:r>
+                        <a:rPr b="0" sz="1000"/>
+                        <a:t>18.6%</a:t>
+                      </a:r>
+                    </a:p>
+                  </a:txBody>
+                  <a:tcPr/>
+                </a:tc>
+              </a:tr>
+              <a:tr h="340360">
+                <a:tc>
+                  <a:txBody>
+                    <a:bodyPr/>
+                    <a:lstStyle/>
+                    <a:p>
+                      <a:pPr algn="ctr"/>
+                      <a:r>
+                        <a:rPr b="0" sz="1000"/>
+                        <a:t>travelbag.co.uk</a:t>
+                      </a:r>
+                    </a:p>
+                  </a:txBody>
+                  <a:tcPr/>
+                </a:tc>
+                <a:tc>
+                  <a:txBody>
+                    <a:bodyPr/>
+                    <a:lstStyle/>
+                    <a:p>
+                      <a:pPr algn="ctr"/>
+                      <a:r>
+                        <a:rPr b="0" sz="1000"/>
+                        <a:t>n/a</a:t>
+                      </a:r>
+                    </a:p>
+                  </a:txBody>
+                  <a:tcPr/>
+                </a:tc>
+                <a:tc>
+                  <a:txBody>
+                    <a:bodyPr/>
+                    <a:lstStyle/>
+                    <a:p>
+                      <a:pPr algn="ctr"/>
+                      <a:r>
+                        <a:rPr b="0" sz="1000"/>
+                        <a:t>9.3%</a:t>
+                      </a:r>
+                    </a:p>
+                  </a:txBody>
+                  <a:tcPr/>
+                </a:tc>
+                <a:tc>
+                  <a:txBody>
+                    <a:bodyPr/>
+                    <a:lstStyle/>
+                    <a:p>
+                      <a:pPr algn="ctr"/>
+                      <a:r>
+                        <a:rPr b="0" sz="1000"/>
+                        <a:t>65.0%</a:t>
+                      </a:r>
+                    </a:p>
+                  </a:txBody>
+                  <a:tcPr/>
+                </a:tc>
+                <a:tc>
+                  <a:txBody>
+                    <a:bodyPr/>
+                    <a:lstStyle/>
+                    <a:p>
+                      <a:pPr algn="ctr"/>
+                      <a:r>
+                        <a:rPr b="0" sz="1000"/>
+                        <a:t>74.8%</a:t>
+                      </a:r>
+                    </a:p>
+                  </a:txBody>
+                  <a:tcPr/>
+                </a:tc>
+                <a:tc>
+                  <a:txBody>
+                    <a:bodyPr/>
+                    <a:lstStyle/>
+                    <a:p>
+                      <a:pPr algn="ctr"/>
+                      <a:r>
+                        <a:rPr b="0" sz="1000"/>
+                        <a:t>19.7%</a:t>
+                      </a:r>
+                    </a:p>
+                  </a:txBody>
+                  <a:tcPr/>
+                </a:tc>
+                <a:tc>
+                  <a:txBody>
+                    <a:bodyPr/>
+                    <a:lstStyle/>
+                    <a:p>
+                      <a:pPr algn="ctr"/>
+                      <a:r>
+                        <a:rPr b="0" sz="1000"/>
+                        <a:t>17.9%</a:t>
+                      </a:r>
+                    </a:p>
+                  </a:txBody>
+                  <a:tcPr/>
+                </a:tc>
+              </a:tr>
+              <a:tr h="340360">
+                <a:tc>
+                  <a:txBody>
+                    <a:bodyPr/>
+                    <a:lstStyle/>
+                    <a:p>
+                      <a:pPr algn="ctr"/>
+                      <a:r>
+                        <a:rPr b="0" sz="1000"/>
+                        <a:t>exoticca.com</a:t>
+                      </a:r>
+                    </a:p>
+                  </a:txBody>
+                  <a:tcPr/>
+                </a:tc>
+                <a:tc>
+                  <a:txBody>
+                    <a:bodyPr/>
+                    <a:lstStyle/>
+                    <a:p>
+                      <a:pPr algn="ctr"/>
+                      <a:r>
+                        <a:rPr b="0" sz="1000"/>
+                        <a:t>n/a</a:t>
+                      </a:r>
+                    </a:p>
+                  </a:txBody>
+                  <a:tcPr/>
+                </a:tc>
+                <a:tc>
+                  <a:txBody>
+                    <a:bodyPr/>
+                    <a:lstStyle/>
+                    <a:p>
+                      <a:pPr algn="ctr"/>
+                      <a:r>
+                        <a:rPr b="0" sz="1000"/>
+                        <a:t>9.4%</a:t>
+                      </a:r>
+                    </a:p>
+                  </a:txBody>
+                  <a:tcPr/>
+                </a:tc>
+                <a:tc>
+                  <a:txBody>
+                    <a:bodyPr/>
+                    <a:lstStyle/>
+                    <a:p>
+                      <a:pPr algn="ctr"/>
+                      <a:r>
+                        <a:rPr b="0" sz="1000"/>
+                        <a:t>45.5%</a:t>
+                      </a:r>
+                    </a:p>
+                  </a:txBody>
+                  <a:tcPr/>
+                </a:tc>
+                <a:tc>
+                  <a:txBody>
+                    <a:bodyPr/>
+                    <a:lstStyle/>
+                    <a:p>
+                      <a:pPr algn="ctr"/>
+                      <a:r>
+                        <a:rPr b="0" sz="1000"/>
+                        <a:t>73.6%</a:t>
+                      </a:r>
+                    </a:p>
+                  </a:txBody>
+                  <a:tcPr/>
+                </a:tc>
+                <a:tc>
+                  <a:txBody>
+                    <a:bodyPr/>
+                    <a:lstStyle/>
+                    <a:p>
+                      <a:pPr algn="ctr"/>
+                      <a:r>
+                        <a:rPr b="0" sz="1000"/>
+                        <a:t>19.0%</a:t>
+                      </a:r>
+                    </a:p>
+                  </a:txBody>
+                  <a:tcPr/>
+                </a:tc>
+                <a:tc>
+                  <a:txBody>
+                    <a:bodyPr/>
+                    <a:lstStyle/>
+                    <a:p>
+                      <a:pPr algn="ctr"/>
+                      <a:r>
+                        <a:rPr b="0" sz="1000"/>
+                        <a:t>18.3%</a:t>
+                      </a:r>
+                    </a:p>
+                  </a:txBody>
+                  <a:tcPr/>
+                </a:tc>
+              </a:tr>
+              <a:tr h="340360">
+                <a:tc>
+                  <a:txBody>
+                    <a:bodyPr/>
+                    <a:lstStyle/>
+                    <a:p>
+                      <a:pPr algn="ctr"/>
+                      <a:r>
+                        <a:rPr b="0" sz="1000"/>
+                        <a:t>loveholidays.com</a:t>
+                      </a:r>
+                    </a:p>
+                  </a:txBody>
+                  <a:tcPr/>
+                </a:tc>
+                <a:tc>
+                  <a:txBody>
+                    <a:bodyPr/>
+                    <a:lstStyle/>
+                    <a:p>
+                      <a:pPr algn="ctr"/>
+                      <a:r>
+                        <a:rPr b="0" sz="1000"/>
+                        <a:t>n/a</a:t>
+                      </a:r>
+                    </a:p>
+                  </a:txBody>
+                  <a:tcPr/>
+                </a:tc>
+                <a:tc>
+                  <a:txBody>
+                    <a:bodyPr/>
+                    <a:lstStyle/>
+                    <a:p>
+                      <a:pPr algn="ctr"/>
+                      <a:r>
+                        <a:rPr b="0" sz="1000"/>
+                        <a:t>4.3%</a:t>
+                      </a:r>
+                    </a:p>
+                  </a:txBody>
+                  <a:tcPr/>
+                </a:tc>
+                <a:tc>
+                  <a:txBody>
+                    <a:bodyPr/>
+                    <a:lstStyle/>
+                    <a:p>
+                      <a:pPr algn="ctr"/>
+                      <a:r>
+                        <a:rPr b="0" sz="1000"/>
+                        <a:t>57.1%</a:t>
+                      </a:r>
+                    </a:p>
+                  </a:txBody>
+                  <a:tcPr/>
+                </a:tc>
+                <a:tc>
+                  <a:txBody>
+                    <a:bodyPr/>
+                    <a:lstStyle/>
+                    <a:p>
+                      <a:pPr algn="ctr"/>
+                      <a:r>
+                        <a:rPr b="0" sz="1000"/>
+                        <a:t>80.2%</a:t>
+                      </a:r>
+                    </a:p>
+                  </a:txBody>
+                  <a:tcPr/>
+                </a:tc>
+                <a:tc>
+                  <a:txBody>
+                    <a:bodyPr/>
+                    <a:lstStyle/>
+                    <a:p>
+                      <a:pPr algn="ctr"/>
+                      <a:r>
+                        <a:rPr b="0" sz="1000"/>
+                        <a:t>20.6%</a:t>
+                      </a:r>
+                    </a:p>
+                  </a:txBody>
+                  <a:tcPr/>
+                </a:tc>
+                <a:tc>
+                  <a:txBody>
+                    <a:bodyPr/>
+                    <a:lstStyle/>
+                    <a:p>
+                      <a:pPr algn="ctr"/>
+                      <a:r>
+                        <a:rPr b="0" sz="1000"/>
+                        <a:t>18.6%</a:t>
+                      </a:r>
+                    </a:p>
+                  </a:txBody>
+                  <a:tcPr/>
+                </a:tc>
+              </a:tr>
+              <a:tr h="340360">
+                <a:tc>
+                  <a:txBody>
+                    <a:bodyPr/>
+                    <a:lstStyle/>
+                    <a:p>
+                      <a:pPr algn="ctr"/>
+                      <a:r>
+                        <a:rPr b="0" sz="1000"/>
+                        <a:t>greatrail.com</a:t>
+                      </a:r>
+                    </a:p>
+                  </a:txBody>
+                  <a:tcPr/>
+                </a:tc>
+                <a:tc>
+                  <a:txBody>
+                    <a:bodyPr/>
+                    <a:lstStyle/>
+                    <a:p>
+                      <a:pPr algn="ctr"/>
+                      <a:r>
+                        <a:rPr b="0" sz="1000"/>
+                        <a:t>n/a</a:t>
+                      </a:r>
+                    </a:p>
+                  </a:txBody>
+                  <a:tcPr/>
+                </a:tc>
+                <a:tc>
+                  <a:txBody>
+                    <a:bodyPr/>
+                    <a:lstStyle/>
+                    <a:p>
+                      <a:pPr algn="ctr"/>
+                      <a:r>
+                        <a:rPr b="0" sz="1000"/>
+                        <a:t>7.7%</a:t>
+                      </a:r>
+                    </a:p>
+                  </a:txBody>
+                  <a:tcPr/>
+                </a:tc>
+                <a:tc>
+                  <a:txBody>
+                    <a:bodyPr/>
+                    <a:lstStyle/>
+                    <a:p>
+                      <a:pPr algn="ctr"/>
+                      <a:r>
+                        <a:rPr b="0" sz="1000"/>
+                        <a:t>52.9%</a:t>
+                      </a:r>
+                    </a:p>
+                  </a:txBody>
+                  <a:tcPr/>
+                </a:tc>
+                <a:tc>
+                  <a:txBody>
+                    <a:bodyPr/>
+                    <a:lstStyle/>
+                    <a:p>
+                      <a:pPr algn="ctr"/>
+                      <a:r>
+                        <a:rPr b="0" sz="1000"/>
+                        <a:t>75.4%</a:t>
+                      </a:r>
+                    </a:p>
+                  </a:txBody>
+                  <a:tcPr/>
+                </a:tc>
+                <a:tc>
+                  <a:txBody>
+                    <a:bodyPr/>
+                    <a:lstStyle/>
+                    <a:p>
+                      <a:pPr algn="ctr"/>
+                      <a:r>
+                        <a:rPr b="0" sz="1000"/>
+                        <a:t>24.4%</a:t>
+                      </a:r>
+                    </a:p>
+                  </a:txBody>
+                  <a:tcPr/>
+                </a:tc>
+                <a:tc>
+                  <a:txBody>
+                    <a:bodyPr/>
+                    <a:lstStyle/>
+                    <a:p>
+                      <a:pPr algn="ctr"/>
+                      <a:r>
+                        <a:rPr b="0" sz="1000"/>
+                        <a:t>18.3%</a:t>
+                      </a:r>
+                    </a:p>
+                  </a:txBody>
+                  <a:tcPr/>
+                </a:tc>
+              </a:tr>
+              <a:tr h="340360">
+                <a:tc>
+                  <a:txBody>
+                    <a:bodyPr/>
+                    <a:lstStyle/>
+                    <a:p>
+                      <a:pPr algn="ctr"/>
+                      <a:r>
+                        <a:rPr b="0" sz="1000"/>
+                        <a:t>getyourguide.com</a:t>
+                      </a:r>
+                    </a:p>
+                  </a:txBody>
+                  <a:tcPr/>
+                </a:tc>
+                <a:tc>
+                  <a:txBody>
+                    <a:bodyPr/>
+                    <a:lstStyle/>
+                    <a:p>
+                      <a:pPr algn="ctr"/>
+                      <a:r>
+                        <a:rPr b="0" sz="1000"/>
+                        <a:t>n/a</a:t>
+                      </a:r>
+                    </a:p>
+                  </a:txBody>
+                  <a:tcPr/>
+                </a:tc>
+                <a:tc>
+                  <a:txBody>
+                    <a:bodyPr/>
+                    <a:lstStyle/>
+                    <a:p>
+                      <a:pPr algn="ctr"/>
+                      <a:r>
+                        <a:rPr b="0" sz="1000"/>
+                        <a:t>2.0%</a:t>
+                      </a:r>
+                    </a:p>
+                  </a:txBody>
+                  <a:tcPr/>
+                </a:tc>
+                <a:tc>
+                  <a:txBody>
+                    <a:bodyPr/>
+                    <a:lstStyle/>
+                    <a:p>
+                      <a:pPr algn="ctr"/>
+                      <a:r>
+                        <a:rPr b="0" sz="1000"/>
+                        <a:t>52.1%</a:t>
+                      </a:r>
+                    </a:p>
+                  </a:txBody>
+                  <a:tcPr/>
+                </a:tc>
+                <a:tc>
+                  <a:txBody>
+                    <a:bodyPr/>
+                    <a:lstStyle/>
+                    <a:p>
+                      <a:pPr algn="ctr"/>
+                      <a:r>
+                        <a:rPr b="0" sz="1000"/>
+                        <a:t>81.5%</a:t>
+                      </a:r>
+                    </a:p>
+                  </a:txBody>
+                  <a:tcPr/>
+                </a:tc>
+                <a:tc>
+                  <a:txBody>
+                    <a:bodyPr/>
+                    <a:lstStyle/>
+                    <a:p>
+                      <a:pPr algn="ctr"/>
+                      <a:r>
+                        <a:rPr b="0" sz="1000"/>
+                        <a:t>31.8%</a:t>
+                      </a:r>
+                    </a:p>
+                  </a:txBody>
+                  <a:tcPr/>
+                </a:tc>
+                <a:tc>
+                  <a:txBody>
+                    <a:bodyPr/>
+                    <a:lstStyle/>
+                    <a:p>
+                      <a:pPr algn="ctr"/>
+                      <a:r>
+                        <a:rPr b="0" sz="1000"/>
+                        <a:t>18.9%</a:t>
+                      </a:r>
+                    </a:p>
+                  </a:txBody>
+                  <a:tcPr/>
+                </a:tc>
+              </a:tr>
+              <a:tr h="340360">
+                <a:tc>
+                  <a:txBody>
+                    <a:bodyPr/>
+                    <a:lstStyle/>
+                    <a:p>
+                      <a:pPr algn="ctr"/>
+                      <a:r>
+                        <a:rPr b="0" sz="1000"/>
+                        <a:t>rivieratravel.co.uk</a:t>
+                      </a:r>
+                    </a:p>
+                  </a:txBody>
+                  <a:tcPr/>
+                </a:tc>
+                <a:tc>
+                  <a:txBody>
+                    <a:bodyPr/>
+                    <a:lstStyle/>
+                    <a:p>
+                      <a:pPr algn="ctr"/>
+                      <a:r>
+                        <a:rPr b="0" sz="1000"/>
+                        <a:t>n/a</a:t>
+                      </a:r>
+                    </a:p>
+                  </a:txBody>
+                  <a:tcPr/>
+                </a:tc>
+                <a:tc>
+                  <a:txBody>
+                    <a:bodyPr/>
+                    <a:lstStyle/>
+                    <a:p>
+                      <a:pPr algn="ctr"/>
+                      <a:r>
+                        <a:rPr b="0" sz="1000"/>
+                        <a:t>12.2%</a:t>
+                      </a:r>
+                    </a:p>
+                  </a:txBody>
+                  <a:tcPr/>
+                </a:tc>
+                <a:tc>
+                  <a:txBody>
+                    <a:bodyPr/>
+                    <a:lstStyle/>
+                    <a:p>
+                      <a:pPr algn="ctr"/>
+                      <a:r>
+                        <a:rPr b="0" sz="1000"/>
+                        <a:t>48.2%</a:t>
+                      </a:r>
+                    </a:p>
+                  </a:txBody>
+                  <a:tcPr/>
+                </a:tc>
+                <a:tc>
+                  <a:txBody>
+                    <a:bodyPr/>
+                    <a:lstStyle/>
+                    <a:p>
+                      <a:pPr algn="ctr"/>
+                      <a:r>
+                        <a:rPr b="0" sz="1000"/>
+                        <a:t>63.0%</a:t>
+                      </a:r>
+                    </a:p>
+                  </a:txBody>
+                  <a:tcPr/>
+                </a:tc>
+                <a:tc>
+                  <a:txBody>
+                    <a:bodyPr/>
+                    <a:lstStyle/>
+                    <a:p>
+                      <a:pPr algn="ctr"/>
+                      <a:r>
+                        <a:rPr b="0" sz="1000"/>
+                        <a:t>17.1%</a:t>
+                      </a:r>
+                    </a:p>
+                  </a:txBody>
+                  <a:tcPr/>
+                </a:tc>
+                <a:tc>
+                  <a:txBody>
+                    <a:bodyPr/>
+                    <a:lstStyle/>
+                    <a:p>
+                      <a:pPr algn="ctr"/>
+                      <a:r>
+                        <a:rPr b="0" sz="1000"/>
+                        <a:t>17.9%</a:t>
+                      </a:r>
+                    </a:p>
+                  </a:txBody>
+                  <a:tcPr/>
+                </a:tc>
+              </a:tr>
+            </a:tbl>
+          </a:graphicData>
+        </a:graphic>
+      </p:graphicFrame>
+      <p:sp>
+        <p:nvSpPr>
+          <p:cNvPr id="5" name="TextBox 4"/>
+          <p:cNvSpPr txBox="1"/>
+          <p:nvPr/>
+        </p:nvSpPr>
+        <p:spPr>
+          <a:xfrm>
+            <a:off x="731520" y="4526280"/>
+            <a:ext cx="10698480" cy="1417320"/>
+          </a:xfrm>
+          <a:prstGeom prst="rect">
+            <a:avLst/>
+          </a:prstGeom>
+          <a:noFill/>
+        </p:spPr>
+        <p:txBody>
+          <a:bodyPr wrap="none">
+            <a:spAutoFit/>
+          </a:bodyPr>
+          <a:lstStyle/>
+          <a:p>
+            <a:pPr>
+              <a:defRPr sz="1400">
+                <a:solidFill>
+                  <a:srgbClr val="2D2D2D"/>
+                </a:solidFill>
+              </a:defRPr>
+            </a:pPr>
+            <a:r>
+              <a:t>audleytravel.com, distantjourneys.co.uk and intrepidtravel.com are the closest competitors based on overlap rate.</a:t>
+            </a:r>
+          </a:p>
+          <a:p>
+            <a:pPr>
+              <a:defRPr sz="1400">
+                <a:solidFill>
+                  <a:srgbClr val="2D2D2D"/>
+                </a:solidFill>
+              </a:defRPr>
+            </a:pPr>
+            <a:r>
+              <a:t>audleytravel.com, you and distantjourneys.co.uk are strongest on impression share among competitors in the file.</a:t>
+            </a:r>
+          </a:p>
+          <a:p>
+            <a:pPr>
+              <a:defRPr sz="1400">
+                <a:solidFill>
+                  <a:srgbClr val="2D2D2D"/>
+                </a:solidFill>
+              </a:defRPr>
+            </a:pPr>
+            <a:r>
+              <a:t>getyourguide.com, tui.co.uk and gadventures.com show the strongest outranking presence where that metric is available.</a:t>
+            </a:r>
+          </a:p>
+        </p:txBody>
+      </p:sp>
+      <p:sp>
+        <p:nvSpPr>
+          <p:cNvPr id="6" name="TextBox 5"/>
+          <p:cNvSpPr txBox="1"/>
+          <p:nvPr/>
+        </p:nvSpPr>
+        <p:spPr>
+          <a:xfrm>
+            <a:off x="548640" y="6217920"/>
+            <a:ext cx="5486400" cy="274320"/>
+          </a:xfrm>
+          <a:prstGeom prst="rect">
+            <a:avLst/>
+          </a:prstGeom>
+          <a:noFill/>
+        </p:spPr>
+        <p:txBody>
+          <a:bodyPr wrap="none">
+            <a:spAutoFit/>
+          </a:bodyPr>
+          <a:lstStyle/>
+          <a:p>
+            <a:r>
+              <a:rPr sz="900">
+                <a:solidFill>
+                  <a:srgbClr val="5A5A5A"/>
+                </a:solidFill>
+              </a:rPr>
+              <a:t>Source: Google Ads Auction Insights</a:t>
+            </a:r>
+          </a:p>
+        </p:txBody>
+      </p:sp>
+    </p:spTree>
+  </p:cSld>
+  <p:clrMapOvr>
+    <a:masterClrMapping/>
+  </p:clrMapOvr>
+</p:sld>
+</file>
+
+<file path=ppt/slides/slide37.xml><?xml version="1.0" encoding="utf-8"?>
+<p:sld xmlns:a="http://schemas.openxmlformats.org/drawingml/2006/main" xmlns:p="http://schemas.openxmlformats.org/presentationml/2006/main" xmlns:r="http://schemas.openxmlformats.org/officeDocument/2006/relationships">
+  <p:cSld>
+    <p:bg>
+      <p:bgPr>
+        <a:solidFill>
+          <a:srgbClr val="F7F9FC"/>
+        </a:solidFill>
+        <a:effectLst/>
+      </p:bgPr>
+    </p:bg>
+    <p:spTree>
+      <p:nvGrpSpPr>
+        <p:cNvPr id="1" name=""/>
+        <p:cNvGrpSpPr/>
+        <p:nvPr/>
+      </p:nvGrpSpPr>
+      <p:grpSpPr/>
+      <p:sp>
+        <p:nvSpPr>
+          <p:cNvPr id="2" name="TextBox 1"/>
+          <p:cNvSpPr txBox="1"/>
+          <p:nvPr/>
+        </p:nvSpPr>
+        <p:spPr>
+          <a:xfrm>
+            <a:off x="182880" y="91440"/>
+            <a:ext cx="2011680" cy="274320"/>
+          </a:xfrm>
+          <a:prstGeom prst="rect">
+            <a:avLst/>
+          </a:prstGeom>
+          <a:noFill/>
+        </p:spPr>
+        <p:txBody>
+          <a:bodyPr wrap="none">
+            <a:spAutoFit/>
+          </a:bodyPr>
+          <a:lstStyle/>
+          <a:p>
+            <a:r>
+              <a:rPr sz="100">
+                <a:solidFill>
+                  <a:srgbClr val="F7F9FC"/>
+                </a:solidFill>
+              </a:rPr>
+              <a:t/>
+            </a:r>
+          </a:p>
+        </p:txBody>
+      </p:sp>
+      <p:sp>
+        <p:nvSpPr>
+          <p:cNvPr id="3" name="TextBox 2"/>
+          <p:cNvSpPr txBox="1"/>
+          <p:nvPr/>
+        </p:nvSpPr>
+        <p:spPr>
+          <a:xfrm>
+            <a:off x="731520" y="2560320"/>
+            <a:ext cx="10058400" cy="822960"/>
+          </a:xfrm>
+          <a:prstGeom prst="rect">
+            <a:avLst/>
+          </a:prstGeom>
+          <a:noFill/>
+        </p:spPr>
+        <p:txBody>
+          <a:bodyPr wrap="none">
+            <a:spAutoFit/>
+          </a:bodyPr>
+          <a:lstStyle/>
+          <a:p>
+            <a:r>
+              <a:rPr sz="4400">
+                <a:solidFill>
+                  <a:srgbClr val="142A4D"/>
+                </a:solidFill>
+              </a:rPr>
+              <a:t>Recommendations</a:t>
+            </a:r>
+          </a:p>
+        </p:txBody>
+      </p:sp>
+    </p:spTree>
+  </p:cSld>
+  <p:clrMapOvr>
+    <a:masterClrMapping/>
+  </p:clrMapOvr>
+</p:sld>
+</file>
+
+<file path=ppt/slides/slide38.xml><?xml version="1.0" encoding="utf-8"?>
+<p:sld xmlns:a="http://schemas.openxmlformats.org/drawingml/2006/main" xmlns:p="http://schemas.openxmlformats.org/presentationml/2006/main" xmlns:r="http://schemas.openxmlformats.org/officeDocument/2006/relationships">
+  <p:cSld>
+    <p:bg>
+      <p:bgPr>
+        <a:solidFill>
+          <a:srgbClr val="F7F9FC"/>
+        </a:solidFill>
+        <a:effectLst/>
+      </p:bgPr>
+    </p:bg>
+    <p:spTree>
+      <p:nvGrpSpPr>
+        <p:cNvPr id="1" name=""/>
+        <p:cNvGrpSpPr/>
+        <p:nvPr/>
+      </p:nvGrpSpPr>
+      <p:grpSpPr/>
+      <p:sp>
+        <p:nvSpPr>
+          <p:cNvPr id="2" name="TextBox 1"/>
+          <p:cNvSpPr txBox="1"/>
+          <p:nvPr/>
+        </p:nvSpPr>
+        <p:spPr>
+          <a:xfrm>
+            <a:off x="548640" y="256032"/>
+            <a:ext cx="11247120" cy="731520"/>
+          </a:xfrm>
+          <a:prstGeom prst="rect">
+            <a:avLst/>
+          </a:prstGeom>
+          <a:noFill/>
+        </p:spPr>
+        <p:txBody>
+          <a:bodyPr wrap="none">
+            <a:spAutoFit/>
+          </a:bodyPr>
+          <a:lstStyle/>
+          <a:p>
+            <a:r>
+              <a:rPr sz="3000" b="1">
+                <a:solidFill>
+                  <a:srgbClr val="142A4D"/>
+                </a:solidFill>
+              </a:rPr>
               <a:t>Recommendations / Next Steps</a:t>
             </a:r>
           </a:p>
@@ -16369,7 +16787,7 @@
               </a:defRPr>
             </a:pPr>
             <a:r>
-              <a:t>Overall generated 4,722 leads from £190,773.79 with a quarter CPL of £40.40.</a:t>
+              <a:t>Overall generated 5,632 leads from £222,611.31 with a quarter CPL of £39.53.</a:t>
             </a:r>
           </a:p>
           <a:p>
@@ -16381,7 +16799,7 @@
               </a:defRPr>
             </a:pPr>
             <a:r>
-              <a:t>Best efficiency was in Mar (£34.66 CPL), while Jan was highest at £41.65.</a:t>
+              <a:t>Best efficiency was in Mar (£34.87 CPL), while Jan was highest at £41.65.</a:t>
             </a:r>
           </a:p>
           <a:p>
@@ -16393,7 +16811,7 @@
               </a:defRPr>
             </a:pPr>
             <a:r>
-              <a:t>YoY vs same quarter last year: leads +34.00%, spend +27.16%.</a:t>
+              <a:t>YoY vs same quarter last year: leads +59.82%, spend +48.39%.</a:t>
             </a:r>
           </a:p>
         </p:txBody>
@@ -16870,105 +17288,105 @@
                       <a:pPr algn="ctr"/>
                       <a:r>
                         <a:rPr b="0" sz="1000"/>
-                        <a:t>1,322,401</a:t>
-                      </a:r>
-                    </a:p>
-                  </a:txBody>
-                  <a:tcPr/>
-                </a:tc>
-                <a:tc>
-                  <a:txBody>
-                    <a:bodyPr/>
-                    <a:lstStyle/>
-                    <a:p>
-                      <a:pPr algn="ctr"/>
-                      <a:r>
-                        <a:rPr b="0" sz="1000"/>
-                        <a:t>16,257</a:t>
-                      </a:r>
-                    </a:p>
-                  </a:txBody>
-                  <a:tcPr/>
-                </a:tc>
-                <a:tc>
-                  <a:txBody>
-                    <a:bodyPr/>
-                    <a:lstStyle/>
-                    <a:p>
-                      <a:pPr algn="ctr"/>
-                      <a:r>
-                        <a:rPr b="0" sz="1000"/>
-                        <a:t>1.23%</a:t>
-                      </a:r>
-                    </a:p>
-                  </a:txBody>
-                  <a:tcPr/>
-                </a:tc>
-                <a:tc>
-                  <a:txBody>
-                    <a:bodyPr/>
-                    <a:lstStyle/>
-                    <a:p>
-                      <a:pPr algn="ctr"/>
-                      <a:r>
-                        <a:rPr b="0" sz="1000"/>
-                        <a:t>£1.06</a:t>
-                      </a:r>
-                    </a:p>
-                  </a:txBody>
-                  <a:tcPr/>
-                </a:tc>
-                <a:tc>
-                  <a:txBody>
-                    <a:bodyPr/>
-                    <a:lstStyle/>
-                    <a:p>
-                      <a:pPr algn="ctr"/>
-                      <a:r>
-                        <a:rPr b="0" sz="1000"/>
-                        <a:t>£17,259.59</a:t>
-                      </a:r>
-                    </a:p>
-                  </a:txBody>
-                  <a:tcPr/>
-                </a:tc>
-                <a:tc>
-                  <a:txBody>
-                    <a:bodyPr/>
-                    <a:lstStyle/>
-                    <a:p>
-                      <a:pPr algn="ctr"/>
-                      <a:r>
-                        <a:rPr b="0" sz="1000"/>
-                        <a:t>498</a:t>
-                      </a:r>
-                    </a:p>
-                  </a:txBody>
-                  <a:tcPr/>
-                </a:tc>
-                <a:tc>
-                  <a:txBody>
-                    <a:bodyPr/>
-                    <a:lstStyle/>
-                    <a:p>
-                      <a:pPr algn="ctr"/>
-                      <a:r>
-                        <a:rPr b="0" sz="1000"/>
-                        <a:t>£34.66</a:t>
-                      </a:r>
-                    </a:p>
-                  </a:txBody>
-                  <a:tcPr/>
-                </a:tc>
-                <a:tc>
-                  <a:txBody>
-                    <a:bodyPr/>
-                    <a:lstStyle/>
-                    <a:p>
-                      <a:pPr algn="ctr"/>
-                      <a:r>
-                        <a:rPr b="0" sz="1000"/>
-                        <a:t>3.06%</a:t>
+                        <a:t>2,625,597</a:t>
+                      </a:r>
+                    </a:p>
+                  </a:txBody>
+                  <a:tcPr/>
+                </a:tc>
+                <a:tc>
+                  <a:txBody>
+                    <a:bodyPr/>
+                    <a:lstStyle/>
+                    <a:p>
+                      <a:pPr algn="ctr"/>
+                      <a:r>
+                        <a:rPr b="0" sz="1000"/>
+                        <a:t>43,243</a:t>
+                      </a:r>
+                    </a:p>
+                  </a:txBody>
+                  <a:tcPr/>
+                </a:tc>
+                <a:tc>
+                  <a:txBody>
+                    <a:bodyPr/>
+                    <a:lstStyle/>
+                    <a:p>
+                      <a:pPr algn="ctr"/>
+                      <a:r>
+                        <a:rPr b="0" sz="1000"/>
+                        <a:t>1.65%</a:t>
+                      </a:r>
+                    </a:p>
+                  </a:txBody>
+                  <a:tcPr/>
+                </a:tc>
+                <a:tc>
+                  <a:txBody>
+                    <a:bodyPr/>
+                    <a:lstStyle/>
+                    <a:p>
+                      <a:pPr algn="ctr"/>
+                      <a:r>
+                        <a:rPr b="0" sz="1000"/>
+                        <a:t>£1.14</a:t>
+                      </a:r>
+                    </a:p>
+                  </a:txBody>
+                  <a:tcPr/>
+                </a:tc>
+                <a:tc>
+                  <a:txBody>
+                    <a:bodyPr/>
+                    <a:lstStyle/>
+                    <a:p>
+                      <a:pPr algn="ctr"/>
+                      <a:r>
+                        <a:rPr b="0" sz="1000"/>
+                        <a:t>£49,097.11</a:t>
+                      </a:r>
+                    </a:p>
+                  </a:txBody>
+                  <a:tcPr/>
+                </a:tc>
+                <a:tc>
+                  <a:txBody>
+                    <a:bodyPr/>
+                    <a:lstStyle/>
+                    <a:p>
+                      <a:pPr algn="ctr"/>
+                      <a:r>
+                        <a:rPr b="0" sz="1000"/>
+                        <a:t>1,408</a:t>
+                      </a:r>
+                    </a:p>
+                  </a:txBody>
+                  <a:tcPr/>
+                </a:tc>
+                <a:tc>
+                  <a:txBody>
+                    <a:bodyPr/>
+                    <a:lstStyle/>
+                    <a:p>
+                      <a:pPr algn="ctr"/>
+                      <a:r>
+                        <a:rPr b="0" sz="1000"/>
+                        <a:t>£34.87</a:t>
+                      </a:r>
+                    </a:p>
+                  </a:txBody>
+                  <a:tcPr/>
+                </a:tc>
+                <a:tc>
+                  <a:txBody>
+                    <a:bodyPr/>
+                    <a:lstStyle/>
+                    <a:p>
+                      <a:pPr algn="ctr"/>
+                      <a:r>
+                        <a:rPr b="0" sz="1000"/>
+                        <a:t>3.26%</a:t>
                       </a:r>
                     </a:p>
                   </a:txBody>
@@ -17002,7 +17420,7 @@
                       <a:pPr algn="ctr"/>
                       <a:r>
                         <a:rPr b="1" sz="1000"/>
-                        <a:t>10,845,936</a:t>
+                        <a:t>12,149,132</a:t>
                       </a:r>
                     </a:p>
                   </a:txBody>
@@ -17020,7 +17438,7 @@
                       <a:pPr algn="ctr"/>
                       <a:r>
                         <a:rPr b="1" sz="1000"/>
-                        <a:t>154,951</a:t>
+                        <a:t>181,937</a:t>
                       </a:r>
                     </a:p>
                   </a:txBody>
@@ -17038,7 +17456,7 @@
                       <a:pPr algn="ctr"/>
                       <a:r>
                         <a:rPr b="1" sz="1000"/>
-                        <a:t>1.43%</a:t>
+                        <a:t>1.50%</a:t>
                       </a:r>
                     </a:p>
                   </a:txBody>
@@ -17056,7 +17474,7 @@
                       <a:pPr algn="ctr"/>
                       <a:r>
                         <a:rPr b="1" sz="1000"/>
-                        <a:t>£1.23</a:t>
+                        <a:t>£1.22</a:t>
                       </a:r>
                     </a:p>
                   </a:txBody>
@@ -17074,7 +17492,7 @@
                       <a:pPr algn="ctr"/>
                       <a:r>
                         <a:rPr b="1" sz="1000"/>
-                        <a:t>£190,773.79</a:t>
+                        <a:t>£222,611.31</a:t>
                       </a:r>
                     </a:p>
                   </a:txBody>
@@ -17092,7 +17510,7 @@
                       <a:pPr algn="ctr"/>
                       <a:r>
                         <a:rPr b="1" sz="1000"/>
-                        <a:t>4,722</a:t>
+                        <a:t>5,632</a:t>
                       </a:r>
                     </a:p>
                   </a:txBody>
@@ -17110,7 +17528,7 @@
                       <a:pPr algn="ctr"/>
                       <a:r>
                         <a:rPr b="1" sz="1000"/>
-                        <a:t>£40.40</a:t>
+                        <a:t>£39.53</a:t>
                       </a:r>
                     </a:p>
                   </a:txBody>
@@ -17128,7 +17546,7 @@
                       <a:pPr algn="ctr"/>
                       <a:r>
                         <a:rPr b="1" sz="1000"/>
-                        <a:t>3.05%</a:t>
+                        <a:t>3.10%</a:t>
                       </a:r>
                     </a:p>
                   </a:txBody>
@@ -17317,7 +17735,7 @@
               </a:defRPr>
             </a:pPr>
             <a:r>
-              <a:t>Generic represented the largest share of spend (65.1%).</a:t>
+              <a:t>Generic represented the largest share of spend (65.9%).</a:t>
             </a:r>
           </a:p>
           <a:p>
@@ -17329,7 +17747,7 @@
               </a:defRPr>
             </a:pPr>
             <a:r>
-              <a:t>Brand delivered the largest share of leads (58.5%).</a:t>
+              <a:t>Brand delivered the largest share of leads (59.9%).</a:t>
             </a:r>
           </a:p>
           <a:p>
@@ -17568,7 +17986,7 @@
               </a:defRPr>
             </a:pPr>
             <a:r>
-              <a:t>Brand generated 2,764 leads from £10,042.30 with a quarter CPL of £3.63.</a:t>
+              <a:t>Brand generated 3,371 leads from £12,689.98 with a quarter CPL of £3.76.</a:t>
             </a:r>
           </a:p>
           <a:p>
@@ -17580,7 +17998,7 @@
               </a:defRPr>
             </a:pPr>
             <a:r>
-              <a:t>Best efficiency was in Mar (£2.88 CPL), while Jan was highest at £4.01.</a:t>
+              <a:t>Best efficiency was in Feb (£3.33 CPL), while Jan was highest at £4.01.</a:t>
             </a:r>
           </a:p>
           <a:p>
@@ -17592,7 +18010,7 @@
               </a:defRPr>
             </a:pPr>
             <a:r>
-              <a:t>YoY vs same quarter last year: leads +302.33%, spend +16.11%.</a:t>
+              <a:t>YoY vs same quarter last year: leads +390.68%, spend +46.72%.</a:t>
             </a:r>
           </a:p>
         </p:txBody>
@@ -18069,105 +18487,105 @@
                       <a:pPr algn="ctr"/>
                       <a:r>
                         <a:rPr b="0" sz="1000"/>
-                        <a:t>5,995</a:t>
-                      </a:r>
-                    </a:p>
-                  </a:txBody>
-                  <a:tcPr/>
-                </a:tc>
-                <a:tc>
-                  <a:txBody>
-                    <a:bodyPr/>
-                    <a:lstStyle/>
-                    <a:p>
-                      <a:pPr algn="ctr"/>
-                      <a:r>
-                        <a:rPr b="0" sz="1000"/>
-                        <a:t>3,154</a:t>
-                      </a:r>
-                    </a:p>
-                  </a:txBody>
-                  <a:tcPr/>
-                </a:tc>
-                <a:tc>
-                  <a:txBody>
-                    <a:bodyPr/>
-                    <a:lstStyle/>
-                    <a:p>
-                      <a:pPr algn="ctr"/>
-                      <a:r>
-                        <a:rPr b="0" sz="1000"/>
-                        <a:t>52.61%</a:t>
-                      </a:r>
-                    </a:p>
-                  </a:txBody>
-                  <a:tcPr/>
-                </a:tc>
-                <a:tc>
-                  <a:txBody>
-                    <a:bodyPr/>
-                    <a:lstStyle/>
-                    <a:p>
-                      <a:pPr algn="ctr"/>
-                      <a:r>
-                        <a:rPr b="0" sz="1000"/>
-                        <a:t>£0.29</a:t>
-                      </a:r>
-                    </a:p>
-                  </a:txBody>
-                  <a:tcPr/>
-                </a:tc>
-                <a:tc>
-                  <a:txBody>
-                    <a:bodyPr/>
-                    <a:lstStyle/>
-                    <a:p>
-                      <a:pPr algn="ctr"/>
-                      <a:r>
-                        <a:rPr b="0" sz="1000"/>
-                        <a:t>£920.12</a:t>
-                      </a:r>
-                    </a:p>
-                  </a:txBody>
-                  <a:tcPr/>
-                </a:tc>
-                <a:tc>
-                  <a:txBody>
-                    <a:bodyPr/>
-                    <a:lstStyle/>
-                    <a:p>
-                      <a:pPr algn="ctr"/>
-                      <a:r>
-                        <a:rPr b="0" sz="1000"/>
-                        <a:t>319</a:t>
-                      </a:r>
-                    </a:p>
-                  </a:txBody>
-                  <a:tcPr/>
-                </a:tc>
-                <a:tc>
-                  <a:txBody>
-                    <a:bodyPr/>
-                    <a:lstStyle/>
-                    <a:p>
-                      <a:pPr algn="ctr"/>
-                      <a:r>
-                        <a:rPr b="0" sz="1000"/>
-                        <a:t>£2.88</a:t>
-                      </a:r>
-                    </a:p>
-                  </a:txBody>
-                  <a:tcPr/>
-                </a:tc>
-                <a:tc>
-                  <a:txBody>
-                    <a:bodyPr/>
-                    <a:lstStyle/>
-                    <a:p>
-                      <a:pPr algn="ctr"/>
-                      <a:r>
-                        <a:rPr b="0" sz="1000"/>
-                        <a:t>10.11%</a:t>
+                        <a:t>19,379</a:t>
+                      </a:r>
+                    </a:p>
+                  </a:txBody>
+                  <a:tcPr/>
+                </a:tc>
+                <a:tc>
+                  <a:txBody>
+                    <a:bodyPr/>
+                    <a:lstStyle/>
+                    <a:p>
+                      <a:pPr algn="ctr"/>
+                      <a:r>
+                        <a:rPr b="0" sz="1000"/>
+                        <a:t>9,574</a:t>
+                      </a:r>
+                    </a:p>
+                  </a:txBody>
+                  <a:tcPr/>
+                </a:tc>
+                <a:tc>
+                  <a:txBody>
+                    <a:bodyPr/>
+                    <a:lstStyle/>
+                    <a:p>
+                      <a:pPr algn="ctr"/>
+                      <a:r>
+                        <a:rPr b="0" sz="1000"/>
+                        <a:t>49.40%</a:t>
+                      </a:r>
+                    </a:p>
+                  </a:txBody>
+                  <a:tcPr/>
+                </a:tc>
+                <a:tc>
+                  <a:txBody>
+                    <a:bodyPr/>
+                    <a:lstStyle/>
+                    <a:p>
+                      <a:pPr algn="ctr"/>
+                      <a:r>
+                        <a:rPr b="0" sz="1000"/>
+                        <a:t>£0.37</a:t>
+                      </a:r>
+                    </a:p>
+                  </a:txBody>
+                  <a:tcPr/>
+                </a:tc>
+                <a:tc>
+                  <a:txBody>
+                    <a:bodyPr/>
+                    <a:lstStyle/>
+                    <a:p>
+                      <a:pPr algn="ctr"/>
+                      <a:r>
+                        <a:rPr b="0" sz="1000"/>
+                        <a:t>£3,567.80</a:t>
+                      </a:r>
+                    </a:p>
+                  </a:txBody>
+                  <a:tcPr/>
+                </a:tc>
+                <a:tc>
+                  <a:txBody>
+                    <a:bodyPr/>
+                    <a:lstStyle/>
+                    <a:p>
+                      <a:pPr algn="ctr"/>
+                      <a:r>
+                        <a:rPr b="0" sz="1000"/>
+                        <a:t>926</a:t>
+                      </a:r>
+                    </a:p>
+                  </a:txBody>
+                  <a:tcPr/>
+                </a:tc>
+                <a:tc>
+                  <a:txBody>
+                    <a:bodyPr/>
+                    <a:lstStyle/>
+                    <a:p>
+                      <a:pPr algn="ctr"/>
+                      <a:r>
+                        <a:rPr b="0" sz="1000"/>
+                        <a:t>£3.85</a:t>
+                      </a:r>
+                    </a:p>
+                  </a:txBody>
+                  <a:tcPr/>
+                </a:tc>
+                <a:tc>
+                  <a:txBody>
+                    <a:bodyPr/>
+                    <a:lstStyle/>
+                    <a:p>
+                      <a:pPr algn="ctr"/>
+                      <a:r>
+                        <a:rPr b="0" sz="1000"/>
+                        <a:t>9.67%</a:t>
                       </a:r>
                     </a:p>
                   </a:txBody>
@@ -18201,7 +18619,7 @@
                       <a:pPr algn="ctr"/>
                       <a:r>
                         <a:rPr b="1" sz="1000"/>
-                        <a:t>57,910</a:t>
+                        <a:t>71,294</a:t>
                       </a:r>
                     </a:p>
                   </a:txBody>
@@ -18219,7 +18637,7 @@
                       <a:pPr algn="ctr"/>
                       <a:r>
                         <a:rPr b="1" sz="1000"/>
-                        <a:t>29,965</a:t>
+                        <a:t>36,385</a:t>
                       </a:r>
                     </a:p>
                   </a:txBody>
@@ -18237,7 +18655,7 @@
                       <a:pPr algn="ctr"/>
                       <a:r>
                         <a:rPr b="1" sz="1000"/>
-                        <a:t>51.74%</a:t>
+                        <a:t>51.04%</a:t>
                       </a:r>
                     </a:p>
                   </a:txBody>
@@ -18255,7 +18673,7 @@
                       <a:pPr algn="ctr"/>
                       <a:r>
                         <a:rPr b="1" sz="1000"/>
-                        <a:t>£0.34</a:t>
+                        <a:t>£0.35</a:t>
                       </a:r>
                     </a:p>
                   </a:txBody>
@@ -18273,7 +18691,7 @@
                       <a:pPr algn="ctr"/>
                       <a:r>
                         <a:rPr b="1" sz="1000"/>
-                        <a:t>£10,042.30</a:t>
+                        <a:t>£12,689.98</a:t>
                       </a:r>
                     </a:p>
                   </a:txBody>
@@ -18291,7 +18709,7 @@
                       <a:pPr algn="ctr"/>
                       <a:r>
                         <a:rPr b="1" sz="1000"/>
-                        <a:t>2,764</a:t>
+                        <a:t>3,371</a:t>
                       </a:r>
                     </a:p>
                   </a:txBody>
@@ -18309,7 +18727,7 @@
                       <a:pPr algn="ctr"/>
                       <a:r>
                         <a:rPr b="1" sz="1000"/>
-                        <a:t>£3.63</a:t>
+                        <a:t>£3.76</a:t>
                       </a:r>
                     </a:p>
                   </a:txBody>
@@ -18327,7 +18745,7 @@
                       <a:pPr algn="ctr"/>
                       <a:r>
                         <a:rPr b="1" sz="1000"/>
-                        <a:t>9.22%</a:t>
+                        <a:t>9.26%</a:t>
                       </a:r>
                     </a:p>
                   </a:txBody>
@@ -18516,7 +18934,7 @@
               </a:defRPr>
             </a:pPr>
             <a:r>
-              <a:t>Brand generated 2,764 leads from £10,042.30 with a quarter CPL of £3.63.</a:t>
+              <a:t>Brand generated 3,371 leads from £12,689.98 with a quarter CPL of £3.76.</a:t>
             </a:r>
           </a:p>
           <a:p>
@@ -18528,7 +18946,7 @@
               </a:defRPr>
             </a:pPr>
             <a:r>
-              <a:t>Best efficiency was in Mar (£2.88 CPL), while Jan was highest at £4.01.</a:t>
+              <a:t>Best efficiency was in Feb (£3.33 CPL), while Jan was highest at £4.01.</a:t>
             </a:r>
           </a:p>
           <a:p>
@@ -18540,7 +18958,7 @@
               </a:defRPr>
             </a:pPr>
             <a:r>
-              <a:t>YoY vs same quarter last year: leads +302.33%, spend +16.11%.</a:t>
+              <a:t>YoY vs same quarter last year: leads +390.68%, spend +46.72%.</a:t>
             </a:r>
           </a:p>
         </p:txBody>
@@ -18767,7 +19185,7 @@
               </a:defRPr>
             </a:pPr>
             <a:r>
-              <a:t>Generic generated 1,112 leads from £124,147.15 with a quarter CPL of £111.64.</a:t>
+              <a:t>Generic generated 1,287 leads from £146,591.38 with a quarter CPL of £113.90.</a:t>
             </a:r>
           </a:p>
           <a:p>
@@ -18779,7 +19197,7 @@
               </a:defRPr>
             </a:pPr>
             <a:r>
-              <a:t>Best efficiency was in Mar (£98.95 CPL), while Jan was highest at £125.55.</a:t>
+              <a:t>Best efficiency was in Feb (£99.32 CPL), while Jan was highest at £125.55.</a:t>
             </a:r>
           </a:p>
           <a:p>
@@ -18791,7 +19209,7 @@
               </a:defRPr>
             </a:pPr>
             <a:r>
-              <a:t>YoY vs same quarter last year: leads -1.68%, spend +5.61%.</a:t>
+              <a:t>YoY vs same quarter last year: leads +13.79%, spend +24.70%.</a:t>
             </a:r>
           </a:p>
         </p:txBody>
@@ -19268,105 +19686,105 @@
                       <a:pPr algn="ctr"/>
                       <a:r>
                         <a:rPr b="0" sz="1000"/>
-                        <a:t>154,992</a:t>
-                      </a:r>
-                    </a:p>
-                  </a:txBody>
-                  <a:tcPr/>
-                </a:tc>
-                <a:tc>
-                  <a:txBody>
-                    <a:bodyPr/>
-                    <a:lstStyle/>
-                    <a:p>
-                      <a:pPr algn="ctr"/>
-                      <a:r>
-                        <a:rPr b="0" sz="1000"/>
-                        <a:t>5,264</a:t>
-                      </a:r>
-                    </a:p>
-                  </a:txBody>
-                  <a:tcPr/>
-                </a:tc>
-                <a:tc>
-                  <a:txBody>
-                    <a:bodyPr/>
-                    <a:lstStyle/>
-                    <a:p>
-                      <a:pPr algn="ctr"/>
-                      <a:r>
-                        <a:rPr b="0" sz="1000"/>
-                        <a:t>3.40%</a:t>
-                      </a:r>
-                    </a:p>
-                  </a:txBody>
-                  <a:tcPr/>
-                </a:tc>
-                <a:tc>
-                  <a:txBody>
-                    <a:bodyPr/>
-                    <a:lstStyle/>
-                    <a:p>
-                      <a:pPr algn="ctr"/>
-                      <a:r>
-                        <a:rPr b="0" sz="1000"/>
-                        <a:t>£2.07</a:t>
-                      </a:r>
-                    </a:p>
-                  </a:txBody>
-                  <a:tcPr/>
-                </a:tc>
-                <a:tc>
-                  <a:txBody>
-                    <a:bodyPr/>
-                    <a:lstStyle/>
-                    <a:p>
-                      <a:pPr algn="ctr"/>
-                      <a:r>
-                        <a:rPr b="0" sz="1000"/>
-                        <a:t>£10,884.36</a:t>
-                      </a:r>
-                    </a:p>
-                  </a:txBody>
-                  <a:tcPr/>
-                </a:tc>
-                <a:tc>
-                  <a:txBody>
-                    <a:bodyPr/>
-                    <a:lstStyle/>
-                    <a:p>
-                      <a:pPr algn="ctr"/>
-                      <a:r>
-                        <a:rPr b="0" sz="1000"/>
-                        <a:t>110</a:t>
-                      </a:r>
-                    </a:p>
-                  </a:txBody>
-                  <a:tcPr/>
-                </a:tc>
-                <a:tc>
-                  <a:txBody>
-                    <a:bodyPr/>
-                    <a:lstStyle/>
-                    <a:p>
-                      <a:pPr algn="ctr"/>
-                      <a:r>
-                        <a:rPr b="0" sz="1000"/>
-                        <a:t>£98.95</a:t>
-                      </a:r>
-                    </a:p>
-                  </a:txBody>
-                  <a:tcPr/>
-                </a:tc>
-                <a:tc>
-                  <a:txBody>
-                    <a:bodyPr/>
-                    <a:lstStyle/>
-                    <a:p>
-                      <a:pPr algn="ctr"/>
-                      <a:r>
-                        <a:rPr b="0" sz="1000"/>
-                        <a:t>2.09%</a:t>
+                        <a:t>429,822</a:t>
+                      </a:r>
+                    </a:p>
+                  </a:txBody>
+                  <a:tcPr/>
+                </a:tc>
+                <a:tc>
+                  <a:txBody>
+                    <a:bodyPr/>
+                    <a:lstStyle/>
+                    <a:p>
+                      <a:pPr algn="ctr"/>
+                      <a:r>
+                        <a:rPr b="0" sz="1000"/>
+                        <a:t>16,157</a:t>
+                      </a:r>
+                    </a:p>
+                  </a:txBody>
+                  <a:tcPr/>
+                </a:tc>
+                <a:tc>
+                  <a:txBody>
+                    <a:bodyPr/>
+                    <a:lstStyle/>
+                    <a:p>
+                      <a:pPr algn="ctr"/>
+                      <a:r>
+                        <a:rPr b="0" sz="1000"/>
+                        <a:t>3.76%</a:t>
+                      </a:r>
+                    </a:p>
+                  </a:txBody>
+                  <a:tcPr/>
+                </a:tc>
+                <a:tc>
+                  <a:txBody>
+                    <a:bodyPr/>
+                    <a:lstStyle/>
+                    <a:p>
+                      <a:pPr algn="ctr"/>
+                      <a:r>
+                        <a:rPr b="0" sz="1000"/>
+                        <a:t>£2.06</a:t>
+                      </a:r>
+                    </a:p>
+                  </a:txBody>
+                  <a:tcPr/>
+                </a:tc>
+                <a:tc>
+                  <a:txBody>
+                    <a:bodyPr/>
+                    <a:lstStyle/>
+                    <a:p>
+                      <a:pPr algn="ctr"/>
+                      <a:r>
+                        <a:rPr b="0" sz="1000"/>
+                        <a:t>£33,328.58</a:t>
+                      </a:r>
+                    </a:p>
+                  </a:txBody>
+                  <a:tcPr/>
+                </a:tc>
+                <a:tc>
+                  <a:txBody>
+                    <a:bodyPr/>
+                    <a:lstStyle/>
+                    <a:p>
+                      <a:pPr algn="ctr"/>
+                      <a:r>
+                        <a:rPr b="0" sz="1000"/>
+                        <a:t>285</a:t>
+                      </a:r>
+                    </a:p>
+                  </a:txBody>
+                  <a:tcPr/>
+                </a:tc>
+                <a:tc>
+                  <a:txBody>
+                    <a:bodyPr/>
+                    <a:lstStyle/>
+                    <a:p>
+                      <a:pPr algn="ctr"/>
+                      <a:r>
+                        <a:rPr b="0" sz="1000"/>
+                        <a:t>£116.94</a:t>
+                      </a:r>
+                    </a:p>
+                  </a:txBody>
+                  <a:tcPr/>
+                </a:tc>
+                <a:tc>
+                  <a:txBody>
+                    <a:bodyPr/>
+                    <a:lstStyle/>
+                    <a:p>
+                      <a:pPr algn="ctr"/>
+                      <a:r>
+                        <a:rPr b="0" sz="1000"/>
+                        <a:t>1.76%</a:t>
                       </a:r>
                     </a:p>
                   </a:txBody>
@@ -19400,7 +19818,7 @@
                       <a:pPr algn="ctr"/>
                       <a:r>
                         <a:rPr b="1" sz="1000"/>
-                        <a:t>914,197</a:t>
+                        <a:t>1,189,027</a:t>
                       </a:r>
                     </a:p>
                   </a:txBody>
@@ -19418,7 +19836,7 @@
                       <a:pPr algn="ctr"/>
                       <a:r>
                         <a:rPr b="1" sz="1000"/>
-                        <a:t>47,215</a:t>
+                        <a:t>58,108</a:t>
                       </a:r>
                     </a:p>
                   </a:txBody>
@@ -19436,7 +19854,7 @@
                       <a:pPr algn="ctr"/>
                       <a:r>
                         <a:rPr b="1" sz="1000"/>
-                        <a:t>5.16%</a:t>
+                        <a:t>4.89%</a:t>
                       </a:r>
                     </a:p>
                   </a:txBody>
@@ -19454,7 +19872,7 @@
                       <a:pPr algn="ctr"/>
                       <a:r>
                         <a:rPr b="1" sz="1000"/>
-                        <a:t>£2.63</a:t>
+                        <a:t>£2.52</a:t>
                       </a:r>
                     </a:p>
                   </a:txBody>
@@ -19472,7 +19890,7 @@
                       <a:pPr algn="ctr"/>
                       <a:r>
                         <a:rPr b="1" sz="1000"/>
-                        <a:t>£124,147.15</a:t>
+                        <a:t>£146,591.38</a:t>
                       </a:r>
                     </a:p>
                   </a:txBody>
@@ -19490,7 +19908,7 @@
                       <a:pPr algn="ctr"/>
                       <a:r>
                         <a:rPr b="1" sz="1000"/>
-                        <a:t>1,112</a:t>
+                        <a:t>1,287</a:t>
                       </a:r>
                     </a:p>
                   </a:txBody>
@@ -19508,7 +19926,7 @@
                       <a:pPr algn="ctr"/>
                       <a:r>
                         <a:rPr b="1" sz="1000"/>
-                        <a:t>£111.64</a:t>
+                        <a:t>£113.90</a:t>
                       </a:r>
                     </a:p>
                   </a:txBody>
@@ -19526,7 +19944,7 @@
                       <a:pPr algn="ctr"/>
                       <a:r>
                         <a:rPr b="1" sz="1000"/>
-                        <a:t>2.36%</a:t>
+                        <a:t>2.21%</a:t>
                       </a:r>
                     </a:p>
                   </a:txBody>
@@ -19715,7 +20133,7 @@
               </a:defRPr>
             </a:pPr>
             <a:r>
-              <a:t>Generic generated 1,112 leads from £124,147.15 with a quarter CPL of £111.64.</a:t>
+              <a:t>Generic generated 1,287 leads from £146,591.38 with a quarter CPL of £113.90.</a:t>
             </a:r>
           </a:p>
           <a:p>
@@ -19727,7 +20145,7 @@
               </a:defRPr>
             </a:pPr>
             <a:r>
-              <a:t>Best efficiency was in Mar (£98.95 CPL), while Jan was highest at £125.55.</a:t>
+              <a:t>Best efficiency was in Feb (£99.32 CPL), while Jan was highest at £125.55.</a:t>
             </a:r>
           </a:p>
           <a:p>
@@ -19739,7 +20157,7 @@
               </a:defRPr>
             </a:pPr>
             <a:r>
-              <a:t>YoY vs same quarter last year: leads -1.68%, spend +5.61%.</a:t>
+              <a:t>YoY vs same quarter last year: leads +13.79%, spend +24.70%.</a:t>
             </a:r>
           </a:p>
         </p:txBody>
